--- a/PowerPoint Project.pptx
+++ b/PowerPoint Project.pptx
@@ -125,7 +125,7 @@
 </file>
 
 <file path=ppt/charts/chart1.xml><?xml version="1.0" encoding="utf-8"?>
-<c:chartSpace xmlns:c="http://schemas.openxmlformats.org/drawingml/2006/chart" xmlns:a="http://schemas.openxmlformats.org/drawingml/2006/main" xmlns:r="http://schemas.openxmlformats.org/officeDocument/2006/relationships" xmlns:c16r2="http://schemas.microsoft.com/office/drawing/2015/06/chart">
+<c:chartSpace xmlns:c="http://schemas.openxmlformats.org/drawingml/2006/chart" xmlns:a="http://schemas.openxmlformats.org/drawingml/2006/main" xmlns:r="http://schemas.openxmlformats.org/officeDocument/2006/relationships">
   <c:date1904 val="0"/>
   <c:lang val="en-US"/>
   <c:roundedCorners val="0"/>
@@ -147,7 +147,7 @@
             <a:pPr>
               <a:defRPr sz="2000" b="1" i="0" u="none" strike="noStrike" kern="1200" spc="0" baseline="0">
                 <a:solidFill>
-                  <a:srgbClr val="00B0F0"/>
+                  <a:schemeClr val="tx1"/>
                 </a:solidFill>
                 <a:latin typeface="+mn-lt"/>
                 <a:ea typeface="+mn-ea"/>
@@ -157,7 +157,7 @@
             <a:r>
               <a:rPr lang="en-US" sz="2000" b="1" dirty="0">
                 <a:solidFill>
-                  <a:srgbClr val="00B0F0"/>
+                  <a:schemeClr val="tx1"/>
                 </a:solidFill>
               </a:rPr>
               <a:t>1. Platform</a:t>
@@ -165,19 +165,20 @@
             <a:r>
               <a:rPr lang="en-US" sz="2000" b="1" baseline="0" dirty="0">
                 <a:solidFill>
-                  <a:srgbClr val="00B0F0"/>
+                  <a:schemeClr val="tx1"/>
                 </a:solidFill>
               </a:rPr>
               <a:t> Usage Percentages </a:t>
             </a:r>
             <a:endParaRPr lang="en-US" sz="2000" b="1" dirty="0">
               <a:solidFill>
-                <a:srgbClr val="00B0F0"/>
+                <a:schemeClr val="tx1"/>
               </a:solidFill>
             </a:endParaRPr>
           </a:p>
         </c:rich>
       </c:tx>
+      <c:layout/>
       <c:overlay val="0"/>
       <c:spPr>
         <a:noFill/>
@@ -193,7 +194,7 @@
           <a:pPr>
             <a:defRPr sz="2000" b="1" i="0" u="none" strike="noStrike" kern="1200" spc="0" baseline="0">
               <a:solidFill>
-                <a:srgbClr val="00B0F0"/>
+                <a:schemeClr val="tx1"/>
               </a:solidFill>
               <a:latin typeface="+mn-lt"/>
               <a:ea typeface="+mn-ea"/>
@@ -227,6 +228,9 @@
             <a:solidFill>
               <a:schemeClr val="bg2"/>
             </a:solidFill>
+            <a:ln>
+              <a:noFill/>
+            </a:ln>
           </c:spPr>
           <c:dPt>
             <c:idx val="0"/>
@@ -236,15 +240,11 @@
                 <a:schemeClr val="accent5"/>
               </a:solidFill>
               <a:ln w="19050">
-                <a:solidFill>
-                  <a:schemeClr val="tx1">
-                    <a:lumMod val="65000"/>
-                  </a:schemeClr>
-                </a:solidFill>
+                <a:noFill/>
               </a:ln>
               <a:effectLst/>
             </c:spPr>
-            <c:extLst>
+            <c:extLst xmlns:c16r2="http://schemas.microsoft.com/office/drawing/2015/06/chart">
               <c:ext xmlns:c16="http://schemas.microsoft.com/office/drawing/2014/chart" uri="{C3380CC4-5D6E-409C-BE32-E72D297353CC}">
                 <c16:uniqueId val="{00000005-9E10-4237-910A-60A0C478E592}"/>
               </c:ext>
@@ -258,15 +258,11 @@
                 <a:schemeClr val="accent2"/>
               </a:solidFill>
               <a:ln w="19050">
-                <a:solidFill>
-                  <a:schemeClr val="tx1">
-                    <a:lumMod val="65000"/>
-                  </a:schemeClr>
-                </a:solidFill>
+                <a:noFill/>
               </a:ln>
               <a:effectLst/>
             </c:spPr>
-            <c:extLst>
+            <c:extLst xmlns:c16r2="http://schemas.microsoft.com/office/drawing/2015/06/chart">
               <c:ext xmlns:c16="http://schemas.microsoft.com/office/drawing/2014/chart" uri="{C3380CC4-5D6E-409C-BE32-E72D297353CC}">
                 <c16:uniqueId val="{00000002-9E10-4237-910A-60A0C478E592}"/>
               </c:ext>
@@ -280,15 +276,11 @@
                 <a:schemeClr val="accent3"/>
               </a:solidFill>
               <a:ln w="19050">
-                <a:solidFill>
-                  <a:schemeClr val="tx1">
-                    <a:lumMod val="65000"/>
-                  </a:schemeClr>
-                </a:solidFill>
+                <a:noFill/>
               </a:ln>
               <a:effectLst/>
             </c:spPr>
-            <c:extLst>
+            <c:extLst xmlns:c16r2="http://schemas.microsoft.com/office/drawing/2015/06/chart">
               <c:ext xmlns:c16="http://schemas.microsoft.com/office/drawing/2014/chart" uri="{C3380CC4-5D6E-409C-BE32-E72D297353CC}">
                 <c16:uniqueId val="{00000003-9E10-4237-910A-60A0C478E592}"/>
               </c:ext>
@@ -302,15 +294,11 @@
                 <a:schemeClr val="accent4"/>
               </a:solidFill>
               <a:ln w="19050">
-                <a:solidFill>
-                  <a:schemeClr val="tx1">
-                    <a:lumMod val="65000"/>
-                  </a:schemeClr>
-                </a:solidFill>
+                <a:noFill/>
               </a:ln>
               <a:effectLst/>
             </c:spPr>
-            <c:extLst>
+            <c:extLst xmlns:c16r2="http://schemas.microsoft.com/office/drawing/2015/06/chart">
               <c:ext xmlns:c16="http://schemas.microsoft.com/office/drawing/2014/chart" uri="{C3380CC4-5D6E-409C-BE32-E72D297353CC}">
                 <c16:uniqueId val="{00000004-9E10-4237-910A-60A0C478E592}"/>
               </c:ext>
@@ -341,10 +329,7 @@
                   <a:pPr>
                     <a:defRPr sz="1400" b="1" i="0" u="none" strike="noStrike" kern="1200" baseline="0">
                       <a:solidFill>
-                        <a:schemeClr val="tx1">
-                          <a:lumMod val="75000"/>
-                          <a:lumOff val="25000"/>
-                        </a:schemeClr>
+                        <a:schemeClr val="bg1"/>
                       </a:solidFill>
                       <a:latin typeface="+mn-lt"/>
                       <a:ea typeface="+mn-ea"/>
@@ -360,7 +345,10 @@
               <c:showSerName val="0"/>
               <c:showPercent val="1"/>
               <c:showBubbleSize val="0"/>
-              <c:extLst>
+              <c:extLst xmlns:c16r2="http://schemas.microsoft.com/office/drawing/2015/06/chart">
+                <c:ext xmlns:c16="http://schemas.microsoft.com/office/drawing/2014/chart" uri="{C3380CC4-5D6E-409C-BE32-E72D297353CC}">
+                  <c16:uniqueId val="{00000005-9E10-4237-910A-60A0C478E592}"/>
+                </c:ext>
                 <c:ext xmlns:c15="http://schemas.microsoft.com/office/drawing/2012/chart" uri="{CE6537A1-D6FC-4f65-9D91-7224C49458BB}">
                   <c15:layout>
                     <c:manualLayout>
@@ -368,9 +356,6 @@
                       <c:h val="0.10151757287095907"/>
                     </c:manualLayout>
                   </c15:layout>
-                </c:ext>
-                <c:ext xmlns:c16="http://schemas.microsoft.com/office/drawing/2014/chart" uri="{C3380CC4-5D6E-409C-BE32-E72D297353CC}">
-                  <c16:uniqueId val="{00000005-9E10-4237-910A-60A0C478E592}"/>
                 </c:ext>
               </c:extLst>
             </c:dLbl>
@@ -398,10 +383,7 @@
                   <a:pPr>
                     <a:defRPr sz="1400" b="1" i="0" u="none" strike="noStrike" kern="1200" baseline="0">
                       <a:solidFill>
-                        <a:schemeClr val="tx1">
-                          <a:lumMod val="75000"/>
-                          <a:lumOff val="25000"/>
-                        </a:schemeClr>
+                        <a:schemeClr val="bg1"/>
                       </a:solidFill>
                       <a:latin typeface="+mn-lt"/>
                       <a:ea typeface="+mn-ea"/>
@@ -417,7 +399,10 @@
               <c:showSerName val="0"/>
               <c:showPercent val="1"/>
               <c:showBubbleSize val="0"/>
-              <c:extLst>
+              <c:extLst xmlns:c16r2="http://schemas.microsoft.com/office/drawing/2015/06/chart">
+                <c:ext xmlns:c16="http://schemas.microsoft.com/office/drawing/2014/chart" uri="{C3380CC4-5D6E-409C-BE32-E72D297353CC}">
+                  <c16:uniqueId val="{00000002-9E10-4237-910A-60A0C478E592}"/>
+                </c:ext>
                 <c:ext xmlns:c15="http://schemas.microsoft.com/office/drawing/2012/chart" uri="{CE6537A1-D6FC-4f65-9D91-7224C49458BB}">
                   <c15:layout>
                     <c:manualLayout>
@@ -425,9 +410,6 @@
                       <c:h val="0.11758047997079435"/>
                     </c:manualLayout>
                   </c15:layout>
-                </c:ext>
-                <c:ext xmlns:c16="http://schemas.microsoft.com/office/drawing/2014/chart" uri="{C3380CC4-5D6E-409C-BE32-E72D297353CC}">
-                  <c16:uniqueId val="{00000002-9E10-4237-910A-60A0C478E592}"/>
                 </c:ext>
               </c:extLst>
             </c:dLbl>
@@ -445,7 +427,10 @@
               <c:showSerName val="0"/>
               <c:showPercent val="1"/>
               <c:showBubbleSize val="0"/>
-              <c:extLst>
+              <c:extLst xmlns:c16r2="http://schemas.microsoft.com/office/drawing/2015/06/chart">
+                <c:ext xmlns:c16="http://schemas.microsoft.com/office/drawing/2014/chart" uri="{C3380CC4-5D6E-409C-BE32-E72D297353CC}">
+                  <c16:uniqueId val="{00000003-9E10-4237-910A-60A0C478E592}"/>
+                </c:ext>
                 <c:ext xmlns:c15="http://schemas.microsoft.com/office/drawing/2012/chart" uri="{CE6537A1-D6FC-4f65-9D91-7224C49458BB}">
                   <c15:layout>
                     <c:manualLayout>
@@ -453,9 +438,6 @@
                       <c:h val="9.6377442599011764E-2"/>
                     </c:manualLayout>
                   </c15:layout>
-                </c:ext>
-                <c:ext xmlns:c16="http://schemas.microsoft.com/office/drawing/2014/chart" uri="{C3380CC4-5D6E-409C-BE32-E72D297353CC}">
-                  <c16:uniqueId val="{00000003-9E10-4237-910A-60A0C478E592}"/>
                 </c:ext>
               </c:extLst>
             </c:dLbl>
@@ -483,10 +465,7 @@
                   <a:pPr>
                     <a:defRPr sz="1400" b="1" i="0" u="none" strike="noStrike" kern="1200" baseline="0">
                       <a:solidFill>
-                        <a:schemeClr val="tx1">
-                          <a:lumMod val="75000"/>
-                          <a:lumOff val="25000"/>
-                        </a:schemeClr>
+                        <a:schemeClr val="bg1"/>
                       </a:solidFill>
                       <a:latin typeface="+mn-lt"/>
                       <a:ea typeface="+mn-ea"/>
@@ -502,7 +481,10 @@
               <c:showSerName val="0"/>
               <c:showPercent val="1"/>
               <c:showBubbleSize val="0"/>
-              <c:extLst>
+              <c:extLst xmlns:c16r2="http://schemas.microsoft.com/office/drawing/2015/06/chart">
+                <c:ext xmlns:c16="http://schemas.microsoft.com/office/drawing/2014/chart" uri="{C3380CC4-5D6E-409C-BE32-E72D297353CC}">
+                  <c16:uniqueId val="{00000004-9E10-4237-910A-60A0C478E592}"/>
+                </c:ext>
                 <c:ext xmlns:c15="http://schemas.microsoft.com/office/drawing/2012/chart" uri="{CE6537A1-D6FC-4f65-9D91-7224C49458BB}">
                   <c15:layout>
                     <c:manualLayout>
@@ -510,9 +492,6 @@
                       <c:h val="0.1587015221463727"/>
                     </c:manualLayout>
                   </c15:layout>
-                </c:ext>
-                <c:ext xmlns:c16="http://schemas.microsoft.com/office/drawing/2014/chart" uri="{C3380CC4-5D6E-409C-BE32-E72D297353CC}">
-                  <c16:uniqueId val="{00000004-9E10-4237-910A-60A0C478E592}"/>
                 </c:ext>
               </c:extLst>
             </c:dLbl>
@@ -532,10 +511,7 @@
                 <a:pPr>
                   <a:defRPr sz="1400" b="1" i="0" u="none" strike="noStrike" kern="1200" baseline="0">
                     <a:solidFill>
-                      <a:schemeClr val="tx1">
-                        <a:lumMod val="75000"/>
-                        <a:lumOff val="25000"/>
-                      </a:schemeClr>
+                      <a:schemeClr val="bg1"/>
                     </a:solidFill>
                     <a:latin typeface="+mn-lt"/>
                     <a:ea typeface="+mn-ea"/>
@@ -566,7 +542,7 @@
                 <a:effectLst/>
               </c:spPr>
             </c:leaderLines>
-            <c:extLst>
+            <c:extLst xmlns:c16r2="http://schemas.microsoft.com/office/drawing/2015/06/chart">
               <c:ext xmlns:c15="http://schemas.microsoft.com/office/drawing/2012/chart" uri="{CE6537A1-D6FC-4f65-9D91-7224C49458BB}"/>
             </c:extLst>
           </c:dLbls>
@@ -611,7 +587,7 @@
               </c:numCache>
             </c:numRef>
           </c:val>
-          <c:extLst>
+          <c:extLst xmlns:c16r2="http://schemas.microsoft.com/office/drawing/2015/06/chart">
             <c:ext xmlns:c16="http://schemas.microsoft.com/office/drawing/2014/chart" uri="{C3380CC4-5D6E-409C-BE32-E72D297353CC}">
               <c16:uniqueId val="{00000000-9E10-4237-910A-60A0C478E592}"/>
             </c:ext>
@@ -639,7 +615,7 @@
     <c:plotVisOnly val="1"/>
     <c:dispBlanksAs val="gap"/>
     <c:showDLblsOverMax val="0"/>
-    <c:extLst>
+    <c:extLst xmlns:c16r2="http://schemas.microsoft.com/office/drawing/2015/06/chart">
       <c:ext xmlns:c16r3="http://schemas.microsoft.com/office/drawing/2017/03/chart" uri="{56B9EC1D-385E-4148-901F-78D8002777C0}">
         <c16r3:dataDisplayOptions16>
           <c16r3:dispNaAsBlank val="1"/>
@@ -671,7 +647,7 @@
 </file>
 
 <file path=ppt/charts/chart2.xml><?xml version="1.0" encoding="utf-8"?>
-<c:chartSpace xmlns:c="http://schemas.openxmlformats.org/drawingml/2006/chart" xmlns:a="http://schemas.openxmlformats.org/drawingml/2006/main" xmlns:r="http://schemas.openxmlformats.org/officeDocument/2006/relationships" xmlns:c16r2="http://schemas.microsoft.com/office/drawing/2015/06/chart">
+<c:chartSpace xmlns:c="http://schemas.openxmlformats.org/drawingml/2006/chart" xmlns:a="http://schemas.openxmlformats.org/drawingml/2006/main" xmlns:r="http://schemas.openxmlformats.org/officeDocument/2006/relationships">
   <c:date1904 val="0"/>
   <c:lang val="en-US"/>
   <c:roundedCorners val="0"/>
@@ -707,6 +683,82 @@
             <a:effectLst/>
           </c:spPr>
           <c:invertIfNegative val="0"/>
+          <c:dPt>
+            <c:idx val="0"/>
+            <c:invertIfNegative val="0"/>
+            <c:bubble3D val="0"/>
+            <c:spPr>
+              <a:solidFill>
+                <a:schemeClr val="bg2">
+                  <a:lumMod val="60000"/>
+                  <a:lumOff val="40000"/>
+                </a:schemeClr>
+              </a:solidFill>
+              <a:ln>
+                <a:noFill/>
+              </a:ln>
+              <a:effectLst/>
+            </c:spPr>
+          </c:dPt>
+          <c:dPt>
+            <c:idx val="1"/>
+            <c:invertIfNegative val="0"/>
+            <c:bubble3D val="0"/>
+            <c:spPr>
+              <a:solidFill>
+                <a:schemeClr val="bg2">
+                  <a:lumMod val="60000"/>
+                  <a:lumOff val="40000"/>
+                </a:schemeClr>
+              </a:solidFill>
+              <a:ln>
+                <a:noFill/>
+              </a:ln>
+              <a:effectLst/>
+            </c:spPr>
+          </c:dPt>
+          <c:dPt>
+            <c:idx val="2"/>
+            <c:invertIfNegative val="0"/>
+            <c:bubble3D val="0"/>
+            <c:spPr>
+              <a:solidFill>
+                <a:schemeClr val="accent2"/>
+              </a:solidFill>
+              <a:ln>
+                <a:noFill/>
+              </a:ln>
+              <a:effectLst/>
+            </c:spPr>
+          </c:dPt>
+          <c:dPt>
+            <c:idx val="3"/>
+            <c:invertIfNegative val="0"/>
+            <c:bubble3D val="0"/>
+            <c:spPr>
+              <a:solidFill>
+                <a:schemeClr val="accent2"/>
+              </a:solidFill>
+              <a:ln>
+                <a:noFill/>
+              </a:ln>
+              <a:effectLst/>
+            </c:spPr>
+          </c:dPt>
+          <c:dPt>
+            <c:idx val="4"/>
+            <c:invertIfNegative val="0"/>
+            <c:bubble3D val="0"/>
+            <c:spPr>
+              <a:solidFill>
+                <a:schemeClr val="accent2"/>
+              </a:solidFill>
+              <a:ln>
+                <a:noFill/>
+              </a:ln>
+              <a:effectLst/>
+            </c:spPr>
+          </c:dPt>
           <c:dLbls>
             <c:spPr>
               <a:noFill/>
@@ -739,8 +791,9 @@
             <c:showPercent val="0"/>
             <c:showBubbleSize val="0"/>
             <c:showLeaderLines val="0"/>
-            <c:extLst>
+            <c:extLst xmlns:c16r2="http://schemas.microsoft.com/office/drawing/2015/06/chart">
               <c:ext xmlns:c15="http://schemas.microsoft.com/office/drawing/2012/chart" uri="{CE6537A1-D6FC-4f65-9D91-7224C49458BB}">
+                <c15:layout/>
                 <c15:showLeaderLines val="1"/>
                 <c15:leaderLines>
                   <c:spPr>
@@ -780,7 +833,7 @@
                   <c:v>Ages 60+: </c:v>
                 </c:pt>
               </c:strCache>
-              <c:extLst/>
+              <c:extLst xmlns:c16r2="http://schemas.microsoft.com/office/drawing/2015/06/chart"/>
             </c:strRef>
           </c:cat>
           <c:val>
@@ -805,10 +858,10 @@
                   <c:v>0.31</c:v>
                 </c:pt>
               </c:numCache>
-              <c:extLst/>
+              <c:extLst xmlns:c16r2="http://schemas.microsoft.com/office/drawing/2015/06/chart"/>
             </c:numRef>
           </c:val>
-          <c:extLst>
+          <c:extLst xmlns:c16r2="http://schemas.microsoft.com/office/drawing/2015/06/chart">
             <c:ext xmlns:c16="http://schemas.microsoft.com/office/drawing/2014/chart" uri="{C3380CC4-5D6E-409C-BE32-E72D297353CC}">
               <c16:uniqueId val="{00000000-BCE3-406E-AB30-FA93458BD443}"/>
             </c:ext>
@@ -823,9 +876,9 @@
           <c:showBubbleSize val="0"/>
         </c:dLbls>
         <c:gapWidth val="75"/>
-        <c:axId val="1264679375"/>
-        <c:axId val="1264679855"/>
-        <c:extLst>
+        <c:axId val="-805118192"/>
+        <c:axId val="-805128528"/>
+        <c:extLst xmlns:c16r2="http://schemas.microsoft.com/office/drawing/2015/06/chart">
           <c:ext xmlns:c15="http://schemas.microsoft.com/office/drawing/2012/chart" uri="{02D57815-91ED-43cb-92C2-25804820EDAC}">
             <c15:filteredBarSeries>
               <c15:ser>
@@ -875,7 +928,7 @@
                   <c:showPercent val="0"/>
                   <c:showBubbleSize val="0"/>
                   <c:showLeaderLines val="0"/>
-                  <c:extLst>
+                  <c:extLst xmlns:c16r2="http://schemas.microsoft.com/office/drawing/2015/06/chart">
                     <c:ext uri="{CE6537A1-D6FC-4f65-9D91-7224C49458BB}">
                       <c15:showLeaderLines val="1"/>
                       <c15:leaderLines>
@@ -897,7 +950,7 @@
                 </c:dLbls>
                 <c:cat>
                   <c:strRef>
-                    <c:extLst>
+                    <c:extLst xmlns:c16r2="http://schemas.microsoft.com/office/drawing/2015/06/chart">
                       <c:ext uri="{02D57815-91ED-43cb-92C2-25804820EDAC}">
                         <c15:formulaRef>
                           <c15:sqref>(Sheet1!$C$5,Sheet1!$C$7,Sheet1!$C$9,Sheet1!$C$11,Sheet1!$C$13)</c15:sqref>
@@ -926,7 +979,7 @@
                 </c:cat>
                 <c:val>
                   <c:numRef>
-                    <c:extLst>
+                    <c:extLst xmlns:c16r2="http://schemas.microsoft.com/office/drawing/2015/06/chart">
                       <c:ext uri="{02D57815-91ED-43cb-92C2-25804820EDAC}">
                         <c15:formulaRef>
                           <c15:sqref>(Sheet1!$D$5,Sheet1!$D$7,Sheet1!$D$9,Sheet1!$D$11,Sheet1!$D$13)</c15:sqref>
@@ -939,7 +992,7 @@
                     </c:numCache>
                   </c:numRef>
                 </c:val>
-                <c:extLst>
+                <c:extLst xmlns:c16r2="http://schemas.microsoft.com/office/drawing/2015/06/chart">
                   <c:ext xmlns:c16="http://schemas.microsoft.com/office/drawing/2014/chart" uri="{C3380CC4-5D6E-409C-BE32-E72D297353CC}">
                     <c16:uniqueId val="{00000001-BCE3-406E-AB30-FA93458BD443}"/>
                   </c:ext>
@@ -994,7 +1047,7 @@
                   <c:showPercent val="0"/>
                   <c:showBubbleSize val="0"/>
                   <c:showLeaderLines val="0"/>
-                  <c:extLst xmlns:c15="http://schemas.microsoft.com/office/drawing/2012/chart">
+                  <c:extLst xmlns:c16r2="http://schemas.microsoft.com/office/drawing/2015/06/chart" xmlns:c15="http://schemas.microsoft.com/office/drawing/2012/chart">
                     <c:ext xmlns:c15="http://schemas.microsoft.com/office/drawing/2012/chart" uri="{CE6537A1-D6FC-4f65-9D91-7224C49458BB}">
                       <c15:showLeaderLines val="1"/>
                       <c15:leaderLines>
@@ -1016,7 +1069,7 @@
                 </c:dLbls>
                 <c:cat>
                   <c:strRef>
-                    <c:extLst xmlns:c15="http://schemas.microsoft.com/office/drawing/2012/chart">
+                    <c:extLst xmlns:c16r2="http://schemas.microsoft.com/office/drawing/2015/06/chart" xmlns:c15="http://schemas.microsoft.com/office/drawing/2012/chart">
                       <c:ext xmlns:c15="http://schemas.microsoft.com/office/drawing/2012/chart" uri="{02D57815-91ED-43cb-92C2-25804820EDAC}">
                         <c15:formulaRef>
                           <c15:sqref>(Sheet1!$C$5,Sheet1!$C$7,Sheet1!$C$9,Sheet1!$C$11,Sheet1!$C$13)</c15:sqref>
@@ -1045,7 +1098,7 @@
                 </c:cat>
                 <c:val>
                   <c:numRef>
-                    <c:extLst xmlns:c15="http://schemas.microsoft.com/office/drawing/2012/chart">
+                    <c:extLst xmlns:c16r2="http://schemas.microsoft.com/office/drawing/2015/06/chart" xmlns:c15="http://schemas.microsoft.com/office/drawing/2012/chart">
                       <c:ext xmlns:c15="http://schemas.microsoft.com/office/drawing/2012/chart" uri="{02D57815-91ED-43cb-92C2-25804820EDAC}">
                         <c15:formulaRef>
                           <c15:sqref>(Sheet1!$E$5,Sheet1!$E$7,Sheet1!$E$9,Sheet1!$E$11,Sheet1!$E$13)</c15:sqref>
@@ -1058,7 +1111,7 @@
                     </c:numCache>
                   </c:numRef>
                 </c:val>
-                <c:extLst xmlns:c15="http://schemas.microsoft.com/office/drawing/2012/chart">
+                <c:extLst xmlns:c16r2="http://schemas.microsoft.com/office/drawing/2015/06/chart" xmlns:c15="http://schemas.microsoft.com/office/drawing/2012/chart">
                   <c:ext xmlns:c16="http://schemas.microsoft.com/office/drawing/2014/chart" uri="{C3380CC4-5D6E-409C-BE32-E72D297353CC}">
                     <c16:uniqueId val="{00000002-BCE3-406E-AB30-FA93458BD443}"/>
                   </c:ext>
@@ -1113,7 +1166,7 @@
                   <c:showPercent val="0"/>
                   <c:showBubbleSize val="0"/>
                   <c:showLeaderLines val="0"/>
-                  <c:extLst xmlns:c15="http://schemas.microsoft.com/office/drawing/2012/chart">
+                  <c:extLst xmlns:c16r2="http://schemas.microsoft.com/office/drawing/2015/06/chart" xmlns:c15="http://schemas.microsoft.com/office/drawing/2012/chart">
                     <c:ext xmlns:c15="http://schemas.microsoft.com/office/drawing/2012/chart" uri="{CE6537A1-D6FC-4f65-9D91-7224C49458BB}">
                       <c15:showLeaderLines val="1"/>
                       <c15:leaderLines>
@@ -1135,7 +1188,7 @@
                 </c:dLbls>
                 <c:cat>
                   <c:strRef>
-                    <c:extLst xmlns:c15="http://schemas.microsoft.com/office/drawing/2012/chart">
+                    <c:extLst xmlns:c16r2="http://schemas.microsoft.com/office/drawing/2015/06/chart" xmlns:c15="http://schemas.microsoft.com/office/drawing/2012/chart">
                       <c:ext xmlns:c15="http://schemas.microsoft.com/office/drawing/2012/chart" uri="{02D57815-91ED-43cb-92C2-25804820EDAC}">
                         <c15:formulaRef>
                           <c15:sqref>(Sheet1!$C$5,Sheet1!$C$7,Sheet1!$C$9,Sheet1!$C$11,Sheet1!$C$13)</c15:sqref>
@@ -1164,7 +1217,7 @@
                 </c:cat>
                 <c:val>
                   <c:numRef>
-                    <c:extLst xmlns:c15="http://schemas.microsoft.com/office/drawing/2012/chart">
+                    <c:extLst xmlns:c16r2="http://schemas.microsoft.com/office/drawing/2015/06/chart" xmlns:c15="http://schemas.microsoft.com/office/drawing/2012/chart">
                       <c:ext xmlns:c15="http://schemas.microsoft.com/office/drawing/2012/chart" uri="{02D57815-91ED-43cb-92C2-25804820EDAC}">
                         <c15:formulaRef>
                           <c15:sqref>(Sheet1!$F$5,Sheet1!$F$7,Sheet1!$F$9,Sheet1!$F$11,Sheet1!$F$13)</c15:sqref>
@@ -1177,7 +1230,7 @@
                     </c:numCache>
                   </c:numRef>
                 </c:val>
-                <c:extLst xmlns:c15="http://schemas.microsoft.com/office/drawing/2012/chart">
+                <c:extLst xmlns:c16r2="http://schemas.microsoft.com/office/drawing/2015/06/chart" xmlns:c15="http://schemas.microsoft.com/office/drawing/2012/chart">
                   <c:ext xmlns:c16="http://schemas.microsoft.com/office/drawing/2014/chart" uri="{C3380CC4-5D6E-409C-BE32-E72D297353CC}">
                     <c16:uniqueId val="{00000003-BCE3-406E-AB30-FA93458BD443}"/>
                   </c:ext>
@@ -1188,7 +1241,7 @@
         </c:extLst>
       </c:barChart>
       <c:catAx>
-        <c:axId val="1264679375"/>
+        <c:axId val="-805118192"/>
         <c:scaling>
           <c:orientation val="minMax"/>
         </c:scaling>
@@ -1228,7 +1281,7 @@
             <a:endParaRPr lang="en-US"/>
           </a:p>
         </c:txPr>
-        <c:crossAx val="1264679855"/>
+        <c:crossAx val="-805128528"/>
         <c:crosses val="autoZero"/>
         <c:auto val="1"/>
         <c:lblAlgn val="ctr"/>
@@ -1236,7 +1289,7 @@
         <c:noMultiLvlLbl val="0"/>
       </c:catAx>
       <c:valAx>
-        <c:axId val="1264679855"/>
+        <c:axId val="-805128528"/>
         <c:scaling>
           <c:orientation val="minMax"/>
         </c:scaling>
@@ -1270,7 +1323,7 @@
             <a:endParaRPr lang="en-US"/>
           </a:p>
         </c:txPr>
-        <c:crossAx val="1264679375"/>
+        <c:crossAx val="-805118192"/>
         <c:crosses val="autoZero"/>
         <c:crossBetween val="between"/>
       </c:valAx>
@@ -1289,7 +1342,7 @@
     <c:plotVisOnly val="1"/>
     <c:dispBlanksAs val="gap"/>
     <c:showDLblsOverMax val="0"/>
-    <c:extLst>
+    <c:extLst xmlns:c16r2="http://schemas.microsoft.com/office/drawing/2015/06/chart">
       <c:ext xmlns:c16r3="http://schemas.microsoft.com/office/drawing/2017/03/chart" uri="{56B9EC1D-385E-4148-901F-78D8002777C0}">
         <c16r3:dataDisplayOptions16>
           <c16r3:dispNaAsBlank val="1"/>
@@ -1325,7 +1378,7 @@
 </file>
 
 <file path=ppt/charts/chart3.xml><?xml version="1.0" encoding="utf-8"?>
-<c:chartSpace xmlns:c="http://schemas.openxmlformats.org/drawingml/2006/chart" xmlns:a="http://schemas.openxmlformats.org/drawingml/2006/main" xmlns:r="http://schemas.openxmlformats.org/officeDocument/2006/relationships" xmlns:c16r2="http://schemas.microsoft.com/office/drawing/2015/06/chart">
+<c:chartSpace xmlns:c="http://schemas.openxmlformats.org/drawingml/2006/chart" xmlns:a="http://schemas.openxmlformats.org/drawingml/2006/main" xmlns:r="http://schemas.openxmlformats.org/officeDocument/2006/relationships">
   <c:date1904 val="0"/>
   <c:lang val="en-US"/>
   <c:roundedCorners val="0"/>
@@ -1353,13 +1406,13 @@
               <c:strCache>
                 <c:ptCount val="1"/>
                 <c:pt idx="0">
-                  <c:v>2023</c:v>
+                  <c:v>TikTok</c:v>
                 </c:pt>
               </c:strCache>
             </c:strRef>
           </c:tx>
           <c:spPr>
-            <a:ln w="57150" cap="sq">
+            <a:ln w="38100" cap="rnd">
               <a:solidFill>
                 <a:schemeClr val="accent1"/>
               </a:solidFill>
@@ -1368,7 +1421,19 @@
             <a:effectLst/>
           </c:spPr>
           <c:marker>
-            <c:symbol val="none"/>
+            <c:symbol val="circle"/>
+            <c:size val="7"/>
+            <c:spPr>
+              <a:solidFill>
+                <a:schemeClr val="accent1"/>
+              </a:solidFill>
+              <a:ln w="9525">
+                <a:solidFill>
+                  <a:schemeClr val="accent1"/>
+                </a:solidFill>
+              </a:ln>
+              <a:effectLst/>
+            </c:spPr>
           </c:marker>
           <c:dLbls>
             <c:spPr>
@@ -1410,6 +1475,7 @@
             <c:showLeaderLines val="0"/>
             <c:extLst>
               <c:ext xmlns:c15="http://schemas.microsoft.com/office/drawing/2012/chart" uri="{CE6537A1-D6FC-4f65-9D91-7224C49458BB}">
+                <c15:layout/>
                 <c15:showLeaderLines val="1"/>
                 <c15:leaderLines>
                   <c:spPr>
@@ -1428,61 +1494,43 @@
               </c:ext>
             </c:extLst>
           </c:dLbls>
-          <c:trendline>
-            <c:spPr>
-              <a:ln w="19050" cap="rnd">
-                <a:noFill/>
-                <a:prstDash val="sysDot"/>
-              </a:ln>
-              <a:effectLst/>
-            </c:spPr>
-            <c:trendlineType val="exp"/>
-            <c:dispRSqr val="0"/>
-            <c:dispEq val="0"/>
-          </c:trendline>
           <c:cat>
-            <c:strRef>
+            <c:numRef>
               <c:f>Sheet1!$A$2:$A$5</c:f>
-              <c:strCache>
-                <c:ptCount val="3"/>
+              <c:numCache>
+                <c:formatCode>General</c:formatCode>
+                <c:ptCount val="4"/>
                 <c:pt idx="0">
-                  <c:v>TiK Tok</c:v>
+                  <c:v>2023</c:v>
                 </c:pt>
                 <c:pt idx="1">
-                  <c:v>Instagram</c:v>
+                  <c:v>2024</c:v>
                 </c:pt>
                 <c:pt idx="2">
-                  <c:v>Facebook</c:v>
+                  <c:v>2025</c:v>
                 </c:pt>
-              </c:strCache>
-              <c:extLst/>
-            </c:strRef>
+              </c:numCache>
+            </c:numRef>
           </c:cat>
           <c:val>
             <c:numRef>
               <c:f>Sheet1!$B$2:$B$5</c:f>
               <c:numCache>
                 <c:formatCode>General</c:formatCode>
-                <c:ptCount val="3"/>
+                <c:ptCount val="4"/>
                 <c:pt idx="0">
                   <c:v>33.299999999999997</c:v>
                 </c:pt>
                 <c:pt idx="1">
-                  <c:v>43</c:v>
+                  <c:v>35.799999999999997</c:v>
                 </c:pt>
                 <c:pt idx="2">
-                  <c:v>65.7</c:v>
+                  <c:v>37.799999999999997</c:v>
                 </c:pt>
               </c:numCache>
-              <c:extLst/>
             </c:numRef>
           </c:val>
           <c:smooth val="0"/>
-          <c:extLst>
-            <c:ext xmlns:c16="http://schemas.microsoft.com/office/drawing/2014/chart" uri="{C3380CC4-5D6E-409C-BE32-E72D297353CC}">
-              <c16:uniqueId val="{00000000-2D0C-4811-B60A-343E95AE9317}"/>
-            </c:ext>
-          </c:extLst>
         </c:ser>
         <c:ser>
           <c:idx val="1"/>
@@ -1493,13 +1541,13 @@
               <c:strCache>
                 <c:ptCount val="1"/>
                 <c:pt idx="0">
-                  <c:v>2024</c:v>
+                  <c:v>Instagram </c:v>
                 </c:pt>
               </c:strCache>
             </c:strRef>
           </c:tx>
           <c:spPr>
-            <a:ln w="57150" cap="rnd">
+            <a:ln w="38100" cap="rnd">
               <a:solidFill>
                 <a:schemeClr val="accent2"/>
               </a:solidFill>
@@ -1508,7 +1556,201 @@
             <a:effectLst/>
           </c:spPr>
           <c:marker>
-            <c:symbol val="none"/>
+            <c:symbol val="circle"/>
+            <c:size val="7"/>
+            <c:spPr>
+              <a:solidFill>
+                <a:schemeClr val="accent2"/>
+              </a:solidFill>
+              <a:ln w="9525">
+                <a:solidFill>
+                  <a:schemeClr val="accent2"/>
+                </a:solidFill>
+              </a:ln>
+              <a:effectLst/>
+            </c:spPr>
+          </c:marker>
+          <c:dLbls>
+            <c:dLbl>
+              <c:idx val="0"/>
+              <c:layout/>
+              <c:dLblPos val="t"/>
+              <c:showLegendKey val="0"/>
+              <c:showVal val="1"/>
+              <c:showCatName val="0"/>
+              <c:showSerName val="0"/>
+              <c:showPercent val="0"/>
+              <c:showBubbleSize val="0"/>
+              <c:extLst>
+                <c:ext xmlns:c15="http://schemas.microsoft.com/office/drawing/2012/chart" uri="{CE6537A1-D6FC-4f65-9D91-7224C49458BB}">
+                  <c15:layout/>
+                </c:ext>
+              </c:extLst>
+            </c:dLbl>
+            <c:dLbl>
+              <c:idx val="1"/>
+              <c:layout/>
+              <c:dLblPos val="t"/>
+              <c:showLegendKey val="0"/>
+              <c:showVal val="1"/>
+              <c:showCatName val="0"/>
+              <c:showSerName val="0"/>
+              <c:showPercent val="0"/>
+              <c:showBubbleSize val="0"/>
+              <c:extLst>
+                <c:ext xmlns:c15="http://schemas.microsoft.com/office/drawing/2012/chart" uri="{CE6537A1-D6FC-4f65-9D91-7224C49458BB}">
+                  <c15:layout/>
+                </c:ext>
+              </c:extLst>
+            </c:dLbl>
+            <c:dLbl>
+              <c:idx val="2"/>
+              <c:layout/>
+              <c:dLblPos val="t"/>
+              <c:showLegendKey val="0"/>
+              <c:showVal val="1"/>
+              <c:showCatName val="0"/>
+              <c:showSerName val="0"/>
+              <c:showPercent val="0"/>
+              <c:showBubbleSize val="0"/>
+              <c:extLst>
+                <c:ext xmlns:c15="http://schemas.microsoft.com/office/drawing/2012/chart" uri="{CE6537A1-D6FC-4f65-9D91-7224C49458BB}">
+                  <c15:layout/>
+                </c:ext>
+              </c:extLst>
+            </c:dLbl>
+            <c:spPr>
+              <a:noFill/>
+              <a:ln>
+                <a:noFill/>
+              </a:ln>
+              <a:effectLst/>
+            </c:spPr>
+            <c:txPr>
+              <a:bodyPr rot="0" spcFirstLastPara="1" vertOverflow="ellipsis" vert="horz" wrap="square" lIns="38100" tIns="19050" rIns="38100" bIns="19050" anchor="ctr" anchorCtr="1">
+                <a:spAutoFit/>
+              </a:bodyPr>
+              <a:lstStyle/>
+              <a:p>
+                <a:pPr>
+                  <a:defRPr sz="1400" b="1" i="0" u="none" strike="noStrike" kern="1200" baseline="0">
+                    <a:solidFill>
+                      <a:schemeClr val="tx1">
+                        <a:lumMod val="75000"/>
+                        <a:lumOff val="25000"/>
+                      </a:schemeClr>
+                    </a:solidFill>
+                    <a:latin typeface="+mn-lt"/>
+                    <a:ea typeface="+mn-ea"/>
+                    <a:cs typeface="+mn-cs"/>
+                  </a:defRPr>
+                </a:pPr>
+                <a:endParaRPr lang="en-US"/>
+              </a:p>
+            </c:txPr>
+            <c:showLegendKey val="0"/>
+            <c:showVal val="1"/>
+            <c:showCatName val="0"/>
+            <c:showSerName val="0"/>
+            <c:showPercent val="0"/>
+            <c:showBubbleSize val="0"/>
+            <c:showLeaderLines val="0"/>
+            <c:extLst>
+              <c:ext xmlns:c15="http://schemas.microsoft.com/office/drawing/2012/chart" uri="{CE6537A1-D6FC-4f65-9D91-7224C49458BB}">
+                <c15:layout/>
+                <c15:showLeaderLines val="1"/>
+                <c15:leaderLines>
+                  <c:spPr>
+                    <a:ln w="9525" cap="flat" cmpd="sng" algn="ctr">
+                      <a:solidFill>
+                        <a:schemeClr val="tx1">
+                          <a:lumMod val="35000"/>
+                          <a:lumOff val="65000"/>
+                        </a:schemeClr>
+                      </a:solidFill>
+                      <a:round/>
+                    </a:ln>
+                    <a:effectLst/>
+                  </c:spPr>
+                </c15:leaderLines>
+              </c:ext>
+            </c:extLst>
+          </c:dLbls>
+          <c:cat>
+            <c:numRef>
+              <c:f>Sheet1!$A$2:$A$5</c:f>
+              <c:numCache>
+                <c:formatCode>General</c:formatCode>
+                <c:ptCount val="4"/>
+                <c:pt idx="0">
+                  <c:v>2023</c:v>
+                </c:pt>
+                <c:pt idx="1">
+                  <c:v>2024</c:v>
+                </c:pt>
+                <c:pt idx="2">
+                  <c:v>2025</c:v>
+                </c:pt>
+              </c:numCache>
+            </c:numRef>
+          </c:cat>
+          <c:val>
+            <c:numRef>
+              <c:f>Sheet1!$C$2:$C$5</c:f>
+              <c:numCache>
+                <c:formatCode>General</c:formatCode>
+                <c:ptCount val="4"/>
+                <c:pt idx="0">
+                  <c:v>43</c:v>
+                </c:pt>
+                <c:pt idx="1">
+                  <c:v>45.3</c:v>
+                </c:pt>
+                <c:pt idx="2">
+                  <c:v>47.5</c:v>
+                </c:pt>
+              </c:numCache>
+            </c:numRef>
+          </c:val>
+          <c:smooth val="0"/>
+        </c:ser>
+        <c:ser>
+          <c:idx val="2"/>
+          <c:order val="2"/>
+          <c:tx>
+            <c:strRef>
+              <c:f>Sheet1!$D$1</c:f>
+              <c:strCache>
+                <c:ptCount val="1"/>
+                <c:pt idx="0">
+                  <c:v>Facebook </c:v>
+                </c:pt>
+              </c:strCache>
+            </c:strRef>
+          </c:tx>
+          <c:spPr>
+            <a:ln w="38100" cap="rnd">
+              <a:solidFill>
+                <a:schemeClr val="accent3"/>
+              </a:solidFill>
+              <a:round/>
+            </a:ln>
+            <a:effectLst/>
+          </c:spPr>
+          <c:marker>
+            <c:symbol val="circle"/>
+            <c:size val="7"/>
+            <c:spPr>
+              <a:solidFill>
+                <a:schemeClr val="accent3"/>
+              </a:solidFill>
+              <a:ln w="9525">
+                <a:solidFill>
+                  <a:schemeClr val="accent3"/>
+                </a:solidFill>
+              </a:ln>
+              <a:effectLst/>
+            </c:spPr>
           </c:marker>
           <c:dLbls>
             <c:spPr>
@@ -1550,6 +1792,7 @@
             <c:showLeaderLines val="0"/>
             <c:extLst>
               <c:ext xmlns:c15="http://schemas.microsoft.com/office/drawing/2012/chart" uri="{CE6537A1-D6FC-4f65-9D91-7224C49458BB}">
+                <c15:layout/>
                 <c15:showLeaderLines val="1"/>
                 <c15:leaderLines>
                   <c:spPr>
@@ -1569,199 +1812,65 @@
             </c:extLst>
           </c:dLbls>
           <c:cat>
-            <c:strRef>
+            <c:numRef>
               <c:f>Sheet1!$A$2:$A$5</c:f>
-              <c:strCache>
-                <c:ptCount val="3"/>
+              <c:numCache>
+                <c:formatCode>General</c:formatCode>
+                <c:ptCount val="4"/>
                 <c:pt idx="0">
-                  <c:v>TiK Tok</c:v>
+                  <c:v>2023</c:v>
                 </c:pt>
                 <c:pt idx="1">
-                  <c:v>Instagram</c:v>
+                  <c:v>2024</c:v>
                 </c:pt>
                 <c:pt idx="2">
-                  <c:v>Facebook</c:v>
-                </c:pt>
-              </c:strCache>
-              <c:extLst/>
-            </c:strRef>
-          </c:cat>
-          <c:val>
-            <c:numRef>
-              <c:f>Sheet1!$C$2:$C$5</c:f>
-              <c:numCache>
-                <c:formatCode>General</c:formatCode>
-                <c:ptCount val="3"/>
-                <c:pt idx="0">
-                  <c:v>35.799999999999997</c:v>
-                </c:pt>
-                <c:pt idx="1">
-                  <c:v>45.3</c:v>
-                </c:pt>
-                <c:pt idx="2">
-                  <c:v>67.7</c:v>
+                  <c:v>2025</c:v>
                 </c:pt>
               </c:numCache>
-              <c:extLst/>
             </c:numRef>
-          </c:val>
-          <c:smooth val="0"/>
-          <c:extLst>
-            <c:ext xmlns:c16="http://schemas.microsoft.com/office/drawing/2014/chart" uri="{C3380CC4-5D6E-409C-BE32-E72D297353CC}">
-              <c16:uniqueId val="{00000001-2D0C-4811-B60A-343E95AE9317}"/>
-            </c:ext>
-          </c:extLst>
-        </c:ser>
-        <c:ser>
-          <c:idx val="2"/>
-          <c:order val="2"/>
-          <c:tx>
-            <c:strRef>
-              <c:f>Sheet1!$D$1</c:f>
-              <c:strCache>
-                <c:ptCount val="1"/>
-                <c:pt idx="0">
-                  <c:v>2025</c:v>
-                </c:pt>
-              </c:strCache>
-            </c:strRef>
-          </c:tx>
-          <c:spPr>
-            <a:ln w="57150" cap="rnd">
-              <a:solidFill>
-                <a:schemeClr val="accent3"/>
-              </a:solidFill>
-              <a:round/>
-            </a:ln>
-            <a:effectLst/>
-          </c:spPr>
-          <c:marker>
-            <c:symbol val="none"/>
-          </c:marker>
-          <c:dLbls>
-            <c:spPr>
-              <a:noFill/>
-              <a:ln>
-                <a:noFill/>
-              </a:ln>
-              <a:effectLst/>
-            </c:spPr>
-            <c:txPr>
-              <a:bodyPr rot="0" spcFirstLastPara="1" vertOverflow="ellipsis" vert="horz" wrap="square" lIns="38100" tIns="19050" rIns="38100" bIns="19050" anchor="ctr" anchorCtr="1">
-                <a:spAutoFit/>
-              </a:bodyPr>
-              <a:lstStyle/>
-              <a:p>
-                <a:pPr>
-                  <a:defRPr sz="1400" b="1" i="0" u="none" strike="noStrike" kern="1200" baseline="0">
-                    <a:solidFill>
-                      <a:schemeClr val="tx1">
-                        <a:lumMod val="75000"/>
-                        <a:lumOff val="25000"/>
-                      </a:schemeClr>
-                    </a:solidFill>
-                    <a:latin typeface="+mn-lt"/>
-                    <a:ea typeface="+mn-ea"/>
-                    <a:cs typeface="+mn-cs"/>
-                  </a:defRPr>
-                </a:pPr>
-                <a:endParaRPr lang="en-US"/>
-              </a:p>
-            </c:txPr>
-            <c:dLblPos val="t"/>
-            <c:showLegendKey val="0"/>
-            <c:showVal val="1"/>
-            <c:showCatName val="0"/>
-            <c:showSerName val="0"/>
-            <c:showPercent val="0"/>
-            <c:showBubbleSize val="0"/>
-            <c:showLeaderLines val="0"/>
-            <c:extLst>
-              <c:ext xmlns:c15="http://schemas.microsoft.com/office/drawing/2012/chart" uri="{CE6537A1-D6FC-4f65-9D91-7224C49458BB}">
-                <c15:showLeaderLines val="1"/>
-                <c15:leaderLines>
-                  <c:spPr>
-                    <a:ln w="9525" cap="flat" cmpd="sng" algn="ctr">
-                      <a:solidFill>
-                        <a:schemeClr val="tx1">
-                          <a:lumMod val="35000"/>
-                          <a:lumOff val="65000"/>
-                        </a:schemeClr>
-                      </a:solidFill>
-                      <a:round/>
-                    </a:ln>
-                    <a:effectLst/>
-                  </c:spPr>
-                </c15:leaderLines>
-              </c:ext>
-            </c:extLst>
-          </c:dLbls>
-          <c:cat>
-            <c:strRef>
-              <c:f>Sheet1!$A$2:$A$5</c:f>
-              <c:strCache>
-                <c:ptCount val="3"/>
-                <c:pt idx="0">
-                  <c:v>TiK Tok</c:v>
-                </c:pt>
-                <c:pt idx="1">
-                  <c:v>Instagram</c:v>
-                </c:pt>
-                <c:pt idx="2">
-                  <c:v>Facebook</c:v>
-                </c:pt>
-              </c:strCache>
-              <c:extLst/>
-            </c:strRef>
           </c:cat>
           <c:val>
             <c:numRef>
               <c:f>Sheet1!$D$2:$D$5</c:f>
               <c:numCache>
                 <c:formatCode>General</c:formatCode>
-                <c:ptCount val="3"/>
+                <c:ptCount val="4"/>
                 <c:pt idx="0">
-                  <c:v>37.799999999999997</c:v>
+                  <c:v>65.7</c:v>
                 </c:pt>
                 <c:pt idx="1">
-                  <c:v>47.5</c:v>
+                  <c:v>67.7</c:v>
                 </c:pt>
                 <c:pt idx="2">
                   <c:v>69.400000000000006</c:v>
                 </c:pt>
               </c:numCache>
-              <c:extLst/>
             </c:numRef>
           </c:val>
           <c:smooth val="0"/>
-          <c:extLst>
-            <c:ext xmlns:c16="http://schemas.microsoft.com/office/drawing/2014/chart" uri="{C3380CC4-5D6E-409C-BE32-E72D297353CC}">
-              <c16:uniqueId val="{00000002-2D0C-4811-B60A-343E95AE9317}"/>
-            </c:ext>
-          </c:extLst>
         </c:ser>
         <c:dLbls>
-          <c:dLblPos val="t"/>
           <c:showLegendKey val="0"/>
-          <c:showVal val="1"/>
+          <c:showVal val="0"/>
           <c:showCatName val="0"/>
           <c:showSerName val="0"/>
           <c:showPercent val="0"/>
           <c:showBubbleSize val="0"/>
         </c:dLbls>
+        <c:marker val="1"/>
         <c:smooth val="0"/>
-        <c:axId val="1098777775"/>
-        <c:axId val="1098778255"/>
+        <c:axId val="-565698208"/>
+        <c:axId val="-565690048"/>
       </c:lineChart>
       <c:catAx>
-        <c:axId val="1098777775"/>
+        <c:axId val="-565698208"/>
         <c:scaling>
           <c:orientation val="minMax"/>
         </c:scaling>
         <c:delete val="0"/>
         <c:axPos val="b"/>
         <c:numFmt formatCode="General" sourceLinked="1"/>
-        <c:majorTickMark val="out"/>
+        <c:majorTickMark val="none"/>
         <c:minorTickMark val="none"/>
         <c:tickLblPos val="nextTo"/>
         <c:spPr>
@@ -1782,7 +1891,7 @@
           <a:lstStyle/>
           <a:p>
             <a:pPr>
-              <a:defRPr sz="1197" b="0" i="0" u="none" strike="noStrike" kern="1200" baseline="0">
+              <a:defRPr sz="1197" b="1" i="0" u="none" strike="noStrike" kern="1200" baseline="0">
                 <a:solidFill>
                   <a:schemeClr val="tx1">
                     <a:lumMod val="65000"/>
@@ -1797,7 +1906,7 @@
             <a:endParaRPr lang="en-US"/>
           </a:p>
         </c:txPr>
-        <c:crossAx val="1098778255"/>
+        <c:crossAx val="-565690048"/>
         <c:crosses val="autoZero"/>
         <c:auto val="1"/>
         <c:lblAlgn val="ctr"/>
@@ -1805,31 +1914,36 @@
         <c:noMultiLvlLbl val="0"/>
       </c:catAx>
       <c:valAx>
-        <c:axId val="1098778255"/>
+        <c:axId val="-565690048"/>
         <c:scaling>
           <c:orientation val="minMax"/>
-          <c:max val="70"/>
-          <c:min val="30"/>
         </c:scaling>
         <c:delete val="0"/>
         <c:axPos val="l"/>
         <c:majorGridlines>
           <c:spPr>
             <a:ln w="9525" cap="flat" cmpd="sng" algn="ctr">
-              <a:noFill/>
+              <a:solidFill>
+                <a:schemeClr val="tx1">
+                  <a:lumMod val="15000"/>
+                  <a:lumOff val="85000"/>
+                </a:schemeClr>
+              </a:solidFill>
               <a:round/>
             </a:ln>
             <a:effectLst/>
           </c:spPr>
         </c:majorGridlines>
         <c:numFmt formatCode="General" sourceLinked="1"/>
-        <c:majorTickMark val="out"/>
+        <c:majorTickMark val="none"/>
         <c:minorTickMark val="none"/>
         <c:tickLblPos val="nextTo"/>
         <c:spPr>
           <a:noFill/>
           <a:ln>
-            <a:noFill/>
+            <a:solidFill>
+              <a:schemeClr val="tx1"/>
+            </a:solidFill>
           </a:ln>
           <a:effectLst/>
         </c:spPr>
@@ -1838,7 +1952,7 @@
           <a:lstStyle/>
           <a:p>
             <a:pPr>
-              <a:defRPr sz="1600" b="1" i="0" u="none" strike="noStrike" kern="1200" baseline="0">
+              <a:defRPr sz="1197" b="1" i="0" u="none" strike="noStrike" kern="1200" baseline="0">
                 <a:solidFill>
                   <a:schemeClr val="tx1">
                     <a:lumMod val="65000"/>
@@ -1853,45 +1967,24 @@
             <a:endParaRPr lang="en-US"/>
           </a:p>
         </c:txPr>
-        <c:crossAx val="1098777775"/>
+        <c:crossAx val="-565698208"/>
         <c:crosses val="autoZero"/>
         <c:crossBetween val="between"/>
       </c:valAx>
-      <c:dTable>
-        <c:showHorzBorder val="1"/>
-        <c:showVertBorder val="1"/>
-        <c:showOutline val="1"/>
-        <c:showKeys val="1"/>
-        <c:spPr>
-          <a:noFill/>
-          <a:ln w="9525" cap="flat" cmpd="sng" algn="ctr">
-            <a:solidFill>
-              <a:schemeClr val="tx1">
-                <a:lumMod val="65000"/>
-              </a:schemeClr>
-            </a:solidFill>
-            <a:round/>
-          </a:ln>
-          <a:effectLst/>
-        </c:spPr>
-        <c:txPr>
-          <a:bodyPr rot="0" spcFirstLastPara="1" vertOverflow="ellipsis" vert="horz" wrap="square" anchor="ctr" anchorCtr="1"/>
-          <a:lstStyle/>
-          <a:p>
-            <a:pPr rtl="0">
-              <a:defRPr sz="1600" b="1" i="0" u="none" strike="noStrike" kern="1200" baseline="0">
-                <a:solidFill>
-                  <a:schemeClr val="tx1"/>
-                </a:solidFill>
-                <a:latin typeface="+mn-lt"/>
-                <a:ea typeface="+mn-ea"/>
-                <a:cs typeface="+mn-cs"/>
-              </a:defRPr>
-            </a:pPr>
-            <a:endParaRPr lang="en-US"/>
-          </a:p>
-        </c:txPr>
-      </c:dTable>
+      <c:spPr>
+        <a:noFill/>
+        <a:ln>
+          <a:solidFill>
+            <a:schemeClr val="tx1"/>
+          </a:solidFill>
+        </a:ln>
+        <a:effectLst/>
+      </c:spPr>
+    </c:plotArea>
+    <c:legend>
+      <c:legendPos val="b"/>
+      <c:layout/>
+      <c:overlay val="0"/>
       <c:spPr>
         <a:noFill/>
         <a:ln>
@@ -1899,26 +1992,35 @@
         </a:ln>
         <a:effectLst/>
       </c:spPr>
-    </c:plotArea>
+      <c:txPr>
+        <a:bodyPr rot="0" spcFirstLastPara="1" vertOverflow="ellipsis" vert="horz" wrap="square" anchor="ctr" anchorCtr="1"/>
+        <a:lstStyle/>
+        <a:p>
+          <a:pPr>
+            <a:defRPr sz="1197" b="1" i="0" u="none" strike="noStrike" kern="1200" baseline="0">
+              <a:solidFill>
+                <a:schemeClr val="tx1">
+                  <a:lumMod val="65000"/>
+                  <a:lumOff val="35000"/>
+                </a:schemeClr>
+              </a:solidFill>
+              <a:latin typeface="+mn-lt"/>
+              <a:ea typeface="+mn-ea"/>
+              <a:cs typeface="+mn-cs"/>
+            </a:defRPr>
+          </a:pPr>
+          <a:endParaRPr lang="en-US"/>
+        </a:p>
+      </c:txPr>
+    </c:legend>
     <c:plotVisOnly val="1"/>
     <c:dispBlanksAs val="gap"/>
     <c:showDLblsOverMax val="0"/>
-    <c:extLst>
-      <c:ext xmlns:c16r3="http://schemas.microsoft.com/office/drawing/2017/03/chart" uri="{56B9EC1D-385E-4148-901F-78D8002777C0}">
-        <c16r3:dataDisplayOptions16>
-          <c16r3:dispNaAsBlank val="1"/>
-        </c16r3:dataDisplayOptions16>
-      </c:ext>
-    </c:extLst>
   </c:chart>
   <c:spPr>
     <a:noFill/>
     <a:ln>
-      <a:solidFill>
-        <a:schemeClr val="tx1">
-          <a:lumMod val="65000"/>
-        </a:schemeClr>
-      </a:solidFill>
+      <a:noFill/>
     </a:ln>
     <a:effectLst/>
   </c:spPr>
@@ -3782,7 +3884,7 @@
           <a:p>
             <a:fld id="{6444479B-705B-4489-957E-7E8A228BDFA0}" type="datetime1">
               <a:rPr lang="en-US" smtClean="0"/>
-              <a:t>6/27/2026</a:t>
+              <a:t>9/17/2026</a:t>
             </a:fld>
             <a:endParaRPr lang="en-US" dirty="0"/>
           </a:p>
@@ -4068,7 +4170,7 @@
           <a:p>
             <a:fld id="{7DA38F49-B3E2-4BF0-BEC7-C30D34ABBB8D}" type="datetime1">
               <a:rPr lang="en-US" smtClean="0"/>
-              <a:t>6/27/2026</a:t>
+              <a:t>9/17/2026</a:t>
             </a:fld>
             <a:endParaRPr lang="en-US" dirty="0"/>
           </a:p>
@@ -4275,7 +4377,7 @@
           <a:p>
             <a:fld id="{7DA38F49-B3E2-4BF0-BEC7-C30D34ABBB8D}" type="datetime1">
               <a:rPr lang="en-US" smtClean="0"/>
-              <a:t>6/27/2026</a:t>
+              <a:t>9/17/2026</a:t>
             </a:fld>
             <a:endParaRPr lang="en-US" dirty="0"/>
           </a:p>
@@ -4561,7 +4663,7 @@
           <a:p>
             <a:fld id="{7DA38F49-B3E2-4BF0-BEC7-C30D34ABBB8D}" type="datetime1">
               <a:rPr lang="en-US" smtClean="0"/>
-              <a:t>6/27/2026</a:t>
+              <a:t>9/17/2026</a:t>
             </a:fld>
             <a:endParaRPr lang="en-US" dirty="0"/>
           </a:p>
@@ -4915,7 +5017,7 @@
           <a:p>
             <a:fld id="{7DA38F49-B3E2-4BF0-BEC7-C30D34ABBB8D}" type="datetime1">
               <a:rPr lang="en-US" smtClean="0"/>
-              <a:t>6/27/2026</a:t>
+              <a:t>9/17/2026</a:t>
             </a:fld>
             <a:endParaRPr lang="en-US" dirty="0"/>
           </a:p>
@@ -5551,7 +5653,7 @@
           <a:p>
             <a:fld id="{7DA38F49-B3E2-4BF0-BEC7-C30D34ABBB8D}" type="datetime1">
               <a:rPr lang="en-US" smtClean="0"/>
-              <a:t>6/27/2026</a:t>
+              <a:t>9/17/2026</a:t>
             </a:fld>
             <a:endParaRPr lang="en-US" dirty="0"/>
           </a:p>
@@ -6421,7 +6523,7 @@
           <a:p>
             <a:fld id="{7DA38F49-B3E2-4BF0-BEC7-C30D34ABBB8D}" type="datetime1">
               <a:rPr lang="en-US" smtClean="0"/>
-              <a:t>6/27/2026</a:t>
+              <a:t>9/17/2026</a:t>
             </a:fld>
             <a:endParaRPr lang="en-US" dirty="0"/>
           </a:p>
@@ -6604,7 +6706,7 @@
           <a:p>
             <a:fld id="{C07B66AD-7C08-490A-ADA4-B47E10FB2407}" type="datetime1">
               <a:rPr lang="en-US" smtClean="0"/>
-              <a:t>6/27/2026</a:t>
+              <a:t>9/17/2026</a:t>
             </a:fld>
             <a:endParaRPr lang="en-US" dirty="0"/>
           </a:p>
@@ -6796,7 +6898,7 @@
           <a:p>
             <a:fld id="{05B95027-4255-49E7-9841-CD21BCC99996}" type="datetime1">
               <a:rPr lang="en-US" smtClean="0"/>
-              <a:t>6/27/2026</a:t>
+              <a:t>9/17/2026</a:t>
             </a:fld>
             <a:endParaRPr lang="en-US" dirty="0"/>
           </a:p>
@@ -6870,7 +6972,7 @@
 </file>
 
 <file path=ppt/slideLayouts/slideLayout2.xml><?xml version="1.0" encoding="utf-8"?>
-<p:sldLayout xmlns:a="http://schemas.openxmlformats.org/drawingml/2006/main" xmlns:r="http://schemas.openxmlformats.org/officeDocument/2006/relationships" xmlns:p="http://schemas.openxmlformats.org/presentationml/2006/main" type="obj" preserve="1">
+<p:sldLayout xmlns:a="http://schemas.openxmlformats.org/drawingml/2006/main" xmlns:r="http://schemas.openxmlformats.org/officeDocument/2006/relationships" xmlns:p="http://schemas.openxmlformats.org/presentationml/2006/main" showMasterSp="0" preserve="1" userDrawn="1">
   <p:cSld name="Title and Content">
     <p:spTree>
       <p:nvGrpSpPr>
@@ -6888,29 +6990,6 @@
       </p:grpSpPr>
       <p:sp>
         <p:nvSpPr>
-          <p:cNvPr id="2" name="Title 1"/>
-          <p:cNvSpPr>
-            <a:spLocks noGrp="1"/>
-          </p:cNvSpPr>
-          <p:nvPr>
-            <p:ph type="title"/>
-          </p:nvPr>
-        </p:nvSpPr>
-        <p:spPr/>
-        <p:txBody>
-          <a:bodyPr/>
-          <a:lstStyle/>
-          <a:p>
-            <a:r>
-              <a:rPr lang="en-US"/>
-              <a:t>Click to edit Master title style</a:t>
-            </a:r>
-            <a:endParaRPr lang="en-US" dirty="0"/>
-          </a:p>
-        </p:txBody>
-      </p:sp>
-      <p:sp>
-        <p:nvSpPr>
           <p:cNvPr id="3" name="Content Placeholder 2"/>
           <p:cNvSpPr>
             <a:spLocks noGrp="1"/>
@@ -6963,7 +7042,30 @@
       </p:sp>
       <p:sp>
         <p:nvSpPr>
-          <p:cNvPr id="7" name="Date Placeholder 3"/>
+          <p:cNvPr id="8" name="Title 7"/>
+          <p:cNvSpPr>
+            <a:spLocks noGrp="1"/>
+          </p:cNvSpPr>
+          <p:nvPr>
+            <p:ph type="title"/>
+          </p:nvPr>
+        </p:nvSpPr>
+        <p:spPr/>
+        <p:txBody>
+          <a:bodyPr/>
+          <a:lstStyle/>
+          <a:p>
+            <a:r>
+              <a:rPr lang="en-US" smtClean="0"/>
+              <a:t>Click to edit Master title style</a:t>
+            </a:r>
+            <a:endParaRPr lang="en-US"/>
+          </a:p>
+        </p:txBody>
+      </p:sp>
+      <p:sp>
+        <p:nvSpPr>
+          <p:cNvPr id="9" name="Date Placeholder 8"/>
           <p:cNvSpPr>
             <a:spLocks noGrp="1"/>
           </p:cNvSpPr>
@@ -6976,9 +7078,9 @@
           <a:bodyPr/>
           <a:lstStyle/>
           <a:p>
-            <a:fld id="{9F89F774-3FA6-43B8-9241-99959C8FD463}" type="datetime1">
+            <a:fld id="{7DA38F49-B3E2-4BF0-BEC7-C30D34ABBB8D}" type="datetime1">
               <a:rPr lang="en-US" smtClean="0"/>
-              <a:t>6/27/2026</a:t>
+              <a:t>9/17/2026</a:t>
             </a:fld>
             <a:endParaRPr lang="en-US" dirty="0"/>
           </a:p>
@@ -6986,7 +7088,7 @@
       </p:sp>
       <p:sp>
         <p:nvSpPr>
-          <p:cNvPr id="5" name="Footer Placeholder 4"/>
+          <p:cNvPr id="10" name="Footer Placeholder 9"/>
           <p:cNvSpPr>
             <a:spLocks noGrp="1"/>
           </p:cNvSpPr>
@@ -7005,7 +7107,7 @@
       </p:sp>
       <p:sp>
         <p:nvSpPr>
-          <p:cNvPr id="6" name="Slide Number Placeholder 5"/>
+          <p:cNvPr id="11" name="Slide Number Placeholder 10"/>
           <p:cNvSpPr>
             <a:spLocks noGrp="1"/>
           </p:cNvSpPr>
@@ -7052,7 +7154,7 @@
 </file>
 
 <file path=ppt/slideLayouts/slideLayout3.xml><?xml version="1.0" encoding="utf-8"?>
-<p:sldLayout xmlns:a="http://schemas.openxmlformats.org/drawingml/2006/main" xmlns:r="http://schemas.openxmlformats.org/officeDocument/2006/relationships" xmlns:p="http://schemas.openxmlformats.org/presentationml/2006/main" type="secHead" preserve="1">
+<p:sldLayout xmlns:a="http://schemas.openxmlformats.org/drawingml/2006/main" xmlns:r="http://schemas.openxmlformats.org/officeDocument/2006/relationships" xmlns:p="http://schemas.openxmlformats.org/presentationml/2006/main" showMasterSp="0" type="secHead" preserve="1">
   <p:cSld name="Section Header">
     <p:spTree>
       <p:nvGrpSpPr>
@@ -7237,7 +7339,7 @@
           <a:p>
             <a:fld id="{F9504452-5DCC-4FE2-A5C9-8A5EF6714D65}" type="datetime1">
               <a:rPr lang="en-US" smtClean="0"/>
-              <a:t>6/27/2026</a:t>
+              <a:t>9/17/2026</a:t>
             </a:fld>
             <a:endParaRPr lang="en-US" dirty="0"/>
           </a:p>
@@ -7541,7 +7643,7 @@
           <a:p>
             <a:fld id="{E579ABC2-0180-4F3A-A895-A85BC724D472}" type="datetime1">
               <a:rPr lang="en-US" smtClean="0"/>
-              <a:t>6/27/2026</a:t>
+              <a:t>9/17/2026</a:t>
             </a:fld>
             <a:endParaRPr lang="en-US" dirty="0"/>
           </a:p>
@@ -7997,7 +8099,7 @@
           <a:p>
             <a:fld id="{6AEEA9BA-4E8F-439E-BEA4-91FBA01E3F5F}" type="datetime1">
               <a:rPr lang="en-US" smtClean="0"/>
-              <a:t>6/27/2026</a:t>
+              <a:t>9/17/2026</a:t>
             </a:fld>
             <a:endParaRPr lang="en-US" dirty="0"/>
           </a:p>
@@ -8127,7 +8229,7 @@
           <a:p>
             <a:fld id="{BE15BF18-0007-481C-AA29-413124BC3EE7}" type="datetime1">
               <a:rPr lang="en-US" smtClean="0"/>
-              <a:t>6/27/2026</a:t>
+              <a:t>9/17/2026</a:t>
             </a:fld>
             <a:endParaRPr lang="en-US" dirty="0"/>
           </a:p>
@@ -8234,7 +8336,7 @@
           <a:p>
             <a:fld id="{09BE9870-3748-43AD-B547-02A075CB4A1D}" type="datetime1">
               <a:rPr lang="en-US" smtClean="0"/>
-              <a:t>6/27/2026</a:t>
+              <a:t>9/17/2026</a:t>
             </a:fld>
             <a:endParaRPr lang="en-US" dirty="0"/>
           </a:p>
@@ -8525,7 +8627,7 @@
           <a:p>
             <a:fld id="{558E7897-33C5-4F1A-9307-D068E37F3DC7}" type="datetime1">
               <a:rPr lang="en-US" smtClean="0"/>
-              <a:t>6/27/2026</a:t>
+              <a:t>9/17/2026</a:t>
             </a:fld>
             <a:endParaRPr lang="en-US" dirty="0"/>
           </a:p>
@@ -8811,7 +8913,7 @@
           <a:p>
             <a:fld id="{82E171BA-CC09-47C8-A6DF-F5C5CB59CEEC}" type="datetime1">
               <a:rPr lang="en-US" smtClean="0"/>
-              <a:t>6/27/2026</a:t>
+              <a:t>9/17/2026</a:t>
             </a:fld>
             <a:endParaRPr lang="en-US" dirty="0"/>
           </a:p>
@@ -9252,7 +9354,7 @@
           <a:p>
             <a:fld id="{7DA38F49-B3E2-4BF0-BEC7-C30D34ABBB8D}" type="datetime1">
               <a:rPr lang="en-US" smtClean="0"/>
-              <a:t>6/27/2026</a:t>
+              <a:t>9/17/2026</a:t>
             </a:fld>
             <a:endParaRPr lang="en-US" dirty="0"/>
           </a:p>
@@ -9777,7 +9879,7 @@
 </file>
 
 <file path=ppt/slides/slide1.xml><?xml version="1.0" encoding="utf-8"?>
-<p:sld xmlns:a="http://schemas.openxmlformats.org/drawingml/2006/main" xmlns:r="http://schemas.openxmlformats.org/officeDocument/2006/relationships" xmlns:p="http://schemas.openxmlformats.org/presentationml/2006/main">
+<p:sld xmlns:a="http://schemas.openxmlformats.org/drawingml/2006/main" xmlns:r="http://schemas.openxmlformats.org/officeDocument/2006/relationships" xmlns:p="http://schemas.openxmlformats.org/presentationml/2006/main" showMasterSp="0">
   <p:cSld>
     <p:bg>
       <p:bgPr>
@@ -9806,7 +9908,7 @@
           <p:cNvPr id="4" name="Picture 3" descr="Network Technology Background">
             <a:extLst>
               <a:ext uri="{FF2B5EF4-FFF2-40B4-BE49-F238E27FC236}">
-                <a16:creationId xmlns:a16="http://schemas.microsoft.com/office/drawing/2014/main" id="{7C49D53C-7303-25BD-0BCF-A1C00DB59589}"/>
+                <a16:creationId xmlns:a16="http://schemas.microsoft.com/office/drawing/2014/main" xmlns="" id="{7C49D53C-7303-25BD-0BCF-A1C00DB59589}"/>
               </a:ext>
             </a:extLst>
           </p:cNvPr>
@@ -9839,7 +9941,7 @@
           <p:cNvPr id="2" name="Title 1">
             <a:extLst>
               <a:ext uri="{FF2B5EF4-FFF2-40B4-BE49-F238E27FC236}">
-                <a16:creationId xmlns:a16="http://schemas.microsoft.com/office/drawing/2014/main" id="{39DB3FE3-BFCD-1E1F-E64B-B74240334014}"/>
+                <a16:creationId xmlns:a16="http://schemas.microsoft.com/office/drawing/2014/main" xmlns="" id="{39DB3FE3-BFCD-1E1F-E64B-B74240334014}"/>
               </a:ext>
             </a:extLst>
           </p:cNvPr>
@@ -9863,7 +9965,7 @@
           <a:lstStyle/>
           <a:p>
             <a:r>
-              <a:rPr lang="en-US" sz="6000" dirty="0">
+              <a:rPr lang="en-US" sz="6000" b="1" dirty="0">
                 <a:solidFill>
                   <a:srgbClr val="FFFFFF"/>
                 </a:solidFill>
@@ -9878,7 +9980,7 @@
           <p:cNvPr id="3" name="Subtitle 2">
             <a:extLst>
               <a:ext uri="{FF2B5EF4-FFF2-40B4-BE49-F238E27FC236}">
-                <a16:creationId xmlns:a16="http://schemas.microsoft.com/office/drawing/2014/main" id="{70627584-BA02-E761-1430-412250018982}"/>
+                <a16:creationId xmlns:a16="http://schemas.microsoft.com/office/drawing/2014/main" xmlns="" id="{70627584-BA02-E761-1430-412250018982}"/>
               </a:ext>
             </a:extLst>
           </p:cNvPr>
@@ -10051,7 +10153,7 @@
           <p:cNvPr id="2" name="Title 1">
             <a:extLst>
               <a:ext uri="{FF2B5EF4-FFF2-40B4-BE49-F238E27FC236}">
-                <a16:creationId xmlns:a16="http://schemas.microsoft.com/office/drawing/2014/main" id="{5B478640-B2FA-3D0E-D456-900B6F7FE043}"/>
+                <a16:creationId xmlns:a16="http://schemas.microsoft.com/office/drawing/2014/main" xmlns="" id="{5B478640-B2FA-3D0E-D456-900B6F7FE043}"/>
               </a:ext>
             </a:extLst>
           </p:cNvPr>
@@ -10089,7 +10191,7 @@
           <p:cNvPr id="3" name="Content Placeholder 2">
             <a:extLst>
               <a:ext uri="{FF2B5EF4-FFF2-40B4-BE49-F238E27FC236}">
-                <a16:creationId xmlns:a16="http://schemas.microsoft.com/office/drawing/2014/main" id="{E3918B3E-5E56-6204-DD1A-99583186DD22}"/>
+                <a16:creationId xmlns:a16="http://schemas.microsoft.com/office/drawing/2014/main" xmlns="" id="{E3918B3E-5E56-6204-DD1A-99583186DD22}"/>
               </a:ext>
             </a:extLst>
           </p:cNvPr>
@@ -10116,12 +10218,98 @@
               <a:buNone/>
             </a:pPr>
             <a:r>
-              <a:rPr lang="en-US" sz="2800" dirty="0"/>
-              <a:t>Social media is a dynamic and rapidly evolving space. To remain competitive in 2025, businesses must adapt their strategies, embracing trends like video dominance, social commerce, and personalized engagement. By prioritizing authenticity, data-driven approaches, and platform-specific content, businesses can connect more deeply with their audiences and achieve sustainable growth in the ever-changing digital landscape. </a:t>
-            </a:r>
-          </a:p>
-          <a:p>
-            <a:pPr algn="ctr"/>
+              <a:rPr lang="en-US" dirty="0"/>
+              <a:t>❖ Social media is a dynamic &amp; fast-evolving space in 2025</a:t>
+            </a:r>
+            <a:r>
+              <a:rPr lang="en-US" dirty="0" smtClean="0"/>
+              <a:t>.</a:t>
+            </a:r>
+          </a:p>
+          <a:p>
+            <a:pPr marL="0" indent="0">
+              <a:buNone/>
+            </a:pPr>
+            <a:r>
+              <a:rPr lang="en-US" dirty="0" smtClean="0"/>
+              <a:t>❖ </a:t>
+            </a:r>
+            <a:r>
+              <a:rPr lang="en-US" dirty="0"/>
+              <a:t>To stay competitive, businesses must adapt to new </a:t>
+            </a:r>
+            <a:r>
+              <a:rPr lang="en-US" dirty="0" smtClean="0"/>
+              <a:t>trends:</a:t>
+            </a:r>
+          </a:p>
+          <a:p>
+            <a:pPr>
+              <a:buFont typeface="Arial" panose="020B0604020202020204" pitchFamily="34" charset="0"/>
+              <a:buChar char="•"/>
+            </a:pPr>
+            <a:r>
+              <a:rPr lang="en-US" dirty="0" smtClean="0"/>
+              <a:t>Video dominance</a:t>
+            </a:r>
+          </a:p>
+          <a:p>
+            <a:pPr>
+              <a:buFont typeface="Arial" panose="020B0604020202020204" pitchFamily="34" charset="0"/>
+              <a:buChar char="•"/>
+            </a:pPr>
+            <a:r>
+              <a:rPr lang="en-US" dirty="0" smtClean="0"/>
+              <a:t>Social commerce</a:t>
+            </a:r>
+          </a:p>
+          <a:p>
+            <a:pPr>
+              <a:buFont typeface="Arial" panose="020B0604020202020204" pitchFamily="34" charset="0"/>
+              <a:buChar char="•"/>
+            </a:pPr>
+            <a:r>
+              <a:rPr lang="en-US" dirty="0" smtClean="0"/>
+              <a:t>Personalized engagement</a:t>
+            </a:r>
+          </a:p>
+          <a:p>
+            <a:pPr marL="0" indent="0">
+              <a:buNone/>
+            </a:pPr>
+            <a:r>
+              <a:rPr lang="en-US" dirty="0" smtClean="0"/>
+              <a:t>❖ </a:t>
+            </a:r>
+            <a:r>
+              <a:rPr lang="en-US" dirty="0"/>
+              <a:t>Focus on authenticity, data-driven approach &amp; platform-specific content</a:t>
+            </a:r>
+            <a:r>
+              <a:rPr lang="en-US" dirty="0" smtClean="0"/>
+              <a:t>.</a:t>
+            </a:r>
+          </a:p>
+          <a:p>
+            <a:pPr marL="0" indent="0">
+              <a:buNone/>
+            </a:pPr>
+            <a:r>
+              <a:rPr lang="en-US" dirty="0" smtClean="0"/>
+              <a:t>❖ </a:t>
+            </a:r>
+            <a:r>
+              <a:rPr lang="en-US" dirty="0"/>
+              <a:t>This will help businesses connect deeply with audiences &amp; </a:t>
+            </a:r>
+            <a:r>
+              <a:rPr lang="en-US" dirty="0" smtClean="0"/>
+              <a:t>achieve               sustainable growth</a:t>
+            </a:r>
+            <a:r>
+              <a:rPr lang="en-US" dirty="0"/>
+              <a:t>.</a:t>
+            </a:r>
             <a:endParaRPr lang="en-US" dirty="0"/>
           </a:p>
         </p:txBody>
@@ -10152,7 +10340,7 @@
 </file>
 
 <file path=ppt/slides/slide11.xml><?xml version="1.0" encoding="utf-8"?>
-<p:sld xmlns:a="http://schemas.openxmlformats.org/drawingml/2006/main" xmlns:r="http://schemas.openxmlformats.org/officeDocument/2006/relationships" xmlns:p="http://schemas.openxmlformats.org/presentationml/2006/main">
+<p:sld xmlns:a="http://schemas.openxmlformats.org/drawingml/2006/main" xmlns:r="http://schemas.openxmlformats.org/officeDocument/2006/relationships" xmlns:p="http://schemas.openxmlformats.org/presentationml/2006/main" showMasterSp="0">
   <p:cSld>
     <p:spTree>
       <p:nvGrpSpPr>
@@ -10173,7 +10361,7 @@
           <p:cNvPr id="7" name="Chart 6">
             <a:extLst>
               <a:ext uri="{FF2B5EF4-FFF2-40B4-BE49-F238E27FC236}">
-                <a16:creationId xmlns:a16="http://schemas.microsoft.com/office/drawing/2014/main" id="{5903C554-F9BF-9890-3205-2E0A256C6E4A}"/>
+                <a16:creationId xmlns:a16="http://schemas.microsoft.com/office/drawing/2014/main" xmlns="" id="{5903C554-F9BF-9890-3205-2E0A256C6E4A}"/>
               </a:ext>
             </a:extLst>
           </p:cNvPr>
@@ -10181,7 +10369,7 @@
           <p:nvPr>
             <p:extLst>
               <p:ext uri="{D42A27DB-BD31-4B8C-83A1-F6EECF244321}">
-                <p14:modId xmlns:p14="http://schemas.microsoft.com/office/powerpoint/2010/main" val="2988638119"/>
+                <p14:modId xmlns:p14="http://schemas.microsoft.com/office/powerpoint/2010/main" val="1967488561"/>
               </p:ext>
             </p:extLst>
           </p:nvPr>
@@ -10201,7 +10389,7 @@
           <p:cNvPr id="14" name="TextBox 13">
             <a:extLst>
               <a:ext uri="{FF2B5EF4-FFF2-40B4-BE49-F238E27FC236}">
-                <a16:creationId xmlns:a16="http://schemas.microsoft.com/office/drawing/2014/main" id="{36F33C66-6862-3305-78E7-361BB7C299A4}"/>
+                <a16:creationId xmlns:a16="http://schemas.microsoft.com/office/drawing/2014/main" xmlns="" id="{36F33C66-6862-3305-78E7-361BB7C299A4}"/>
               </a:ext>
             </a:extLst>
           </p:cNvPr>
@@ -10256,7 +10444,7 @@
           <p:cNvPr id="15" name="Chart 14">
             <a:extLst>
               <a:ext uri="{FF2B5EF4-FFF2-40B4-BE49-F238E27FC236}">
-                <a16:creationId xmlns:a16="http://schemas.microsoft.com/office/drawing/2014/main" id="{FAFA33DC-6844-5097-01CE-7C89E5E63E47}"/>
+                <a16:creationId xmlns:a16="http://schemas.microsoft.com/office/drawing/2014/main" xmlns="" id="{FAFA33DC-6844-5097-01CE-7C89E5E63E47}"/>
               </a:ext>
             </a:extLst>
           </p:cNvPr>
@@ -10266,7 +10454,7 @@
           <p:nvPr>
             <p:extLst>
               <p:ext uri="{D42A27DB-BD31-4B8C-83A1-F6EECF244321}">
-                <p14:modId xmlns:p14="http://schemas.microsoft.com/office/powerpoint/2010/main" val="2935922962"/>
+                <p14:modId xmlns:p14="http://schemas.microsoft.com/office/powerpoint/2010/main" val="3615034565"/>
               </p:ext>
             </p:extLst>
           </p:nvPr>
@@ -10286,7 +10474,7 @@
           <p:cNvPr id="16" name="TextBox 15">
             <a:extLst>
               <a:ext uri="{FF2B5EF4-FFF2-40B4-BE49-F238E27FC236}">
-                <a16:creationId xmlns:a16="http://schemas.microsoft.com/office/drawing/2014/main" id="{EC253FDF-975C-64AD-A6D8-181A52B0668A}"/>
+                <a16:creationId xmlns:a16="http://schemas.microsoft.com/office/drawing/2014/main" xmlns="" id="{EC253FDF-975C-64AD-A6D8-181A52B0668A}"/>
               </a:ext>
             </a:extLst>
           </p:cNvPr>
@@ -10311,50 +10499,26 @@
           <a:p>
             <a:pPr algn="ctr"/>
             <a:r>
-              <a:rPr lang="en-US" sz="2000" b="1" dirty="0">
-                <a:solidFill>
-                  <a:srgbClr val="00B0F0"/>
-                </a:solidFill>
-              </a:rPr>
+              <a:rPr lang="en-US" sz="2000" b="1" dirty="0"/>
               <a:t>2. Age</a:t>
             </a:r>
             <a:r>
-              <a:rPr lang="en-US" b="1" dirty="0">
-                <a:solidFill>
-                  <a:srgbClr val="00B0F0"/>
-                </a:solidFill>
-              </a:rPr>
+              <a:rPr lang="en-US" b="1" dirty="0"/>
               <a:t> </a:t>
             </a:r>
             <a:r>
-              <a:rPr lang="en-US" sz="2000" b="1" dirty="0">
-                <a:solidFill>
-                  <a:srgbClr val="00B0F0"/>
-                </a:solidFill>
-              </a:rPr>
+              <a:rPr lang="en-US" sz="2000" b="1" dirty="0"/>
               <a:t>group</a:t>
             </a:r>
             <a:r>
-              <a:rPr lang="en-US" b="1" dirty="0">
-                <a:solidFill>
-                  <a:srgbClr val="00B0F0"/>
-                </a:solidFill>
-              </a:rPr>
+              <a:rPr lang="en-US" b="1" dirty="0"/>
               <a:t> </a:t>
             </a:r>
             <a:r>
-              <a:rPr lang="en-US" sz="2000" b="1" dirty="0">
-                <a:solidFill>
-                  <a:srgbClr val="00B0F0"/>
-                </a:solidFill>
-              </a:rPr>
+              <a:rPr lang="en-US" sz="2000" b="1" dirty="0"/>
               <a:t>breakdown</a:t>
             </a:r>
-            <a:endParaRPr lang="en-US" dirty="0">
-              <a:solidFill>
-                <a:srgbClr val="00B0F0"/>
-              </a:solidFill>
-            </a:endParaRPr>
+            <a:endParaRPr lang="en-US" dirty="0"/>
           </a:p>
         </p:txBody>
       </p:sp>
@@ -10384,7 +10548,7 @@
 </file>
 
 <file path=ppt/slides/slide12.xml><?xml version="1.0" encoding="utf-8"?>
-<p:sld xmlns:a="http://schemas.openxmlformats.org/drawingml/2006/main" xmlns:r="http://schemas.openxmlformats.org/officeDocument/2006/relationships" xmlns:p="http://schemas.openxmlformats.org/presentationml/2006/main">
+<p:sld xmlns:a="http://schemas.openxmlformats.org/drawingml/2006/main" xmlns:r="http://schemas.openxmlformats.org/officeDocument/2006/relationships" xmlns:p="http://schemas.openxmlformats.org/presentationml/2006/main" showMasterSp="0">
   <p:cSld>
     <p:spTree>
       <p:nvGrpSpPr>
@@ -10400,40 +10564,12 @@
           <a:chExt cx="0" cy="0"/>
         </a:xfrm>
       </p:grpSpPr>
-      <p:graphicFrame>
-        <p:nvGraphicFramePr>
-          <p:cNvPr id="5" name="Chart 4">
-            <a:extLst>
-              <a:ext uri="{FF2B5EF4-FFF2-40B4-BE49-F238E27FC236}">
-                <a16:creationId xmlns:a16="http://schemas.microsoft.com/office/drawing/2014/main" id="{24776E84-3A7D-C181-361F-0833088412E1}"/>
-              </a:ext>
-            </a:extLst>
-          </p:cNvPr>
-          <p:cNvGraphicFramePr/>
-          <p:nvPr>
-            <p:extLst>
-              <p:ext uri="{D42A27DB-BD31-4B8C-83A1-F6EECF244321}">
-                <p14:modId xmlns:p14="http://schemas.microsoft.com/office/powerpoint/2010/main" val="1308067060"/>
-              </p:ext>
-            </p:extLst>
-          </p:nvPr>
-        </p:nvGraphicFramePr>
-        <p:xfrm>
-          <a:off x="1752601" y="1709058"/>
-          <a:ext cx="7609114" cy="4636104"/>
-        </p:xfrm>
-        <a:graphic>
-          <a:graphicData uri="http://schemas.openxmlformats.org/drawingml/2006/chart">
-            <c:chart xmlns:c="http://schemas.openxmlformats.org/drawingml/2006/chart" xmlns:r="http://schemas.openxmlformats.org/officeDocument/2006/relationships" r:id="rId2"/>
-          </a:graphicData>
-        </a:graphic>
-      </p:graphicFrame>
       <p:sp>
         <p:nvSpPr>
           <p:cNvPr id="6" name="TextBox 5">
             <a:extLst>
               <a:ext uri="{FF2B5EF4-FFF2-40B4-BE49-F238E27FC236}">
-                <a16:creationId xmlns:a16="http://schemas.microsoft.com/office/drawing/2014/main" id="{7C8DC492-4631-21A3-9637-BE072E1CEF1D}"/>
+                <a16:creationId xmlns:a16="http://schemas.microsoft.com/office/drawing/2014/main" xmlns="" id="{7C8DC492-4631-21A3-9637-BE072E1CEF1D}"/>
               </a:ext>
             </a:extLst>
           </p:cNvPr>
@@ -10442,7 +10578,7 @@
         </p:nvSpPr>
         <p:spPr>
           <a:xfrm>
-            <a:off x="2155372" y="1134050"/>
+            <a:off x="1938647" y="1134050"/>
             <a:ext cx="7609114" cy="400110"/>
           </a:xfrm>
           <a:prstGeom prst="rect">
@@ -10457,11 +10593,7 @@
           <a:lstStyle/>
           <a:p>
             <a:r>
-              <a:rPr lang="en-US" sz="2000" b="1" dirty="0">
-                <a:solidFill>
-                  <a:srgbClr val="00B0F0"/>
-                </a:solidFill>
-              </a:rPr>
+              <a:rPr lang="en-US" sz="2000" b="1" dirty="0"/>
               <a:t>3. Growth of video content over past 3 years</a:t>
             </a:r>
           </a:p>
@@ -10472,7 +10604,7 @@
           <p:cNvPr id="2" name="TextBox 1">
             <a:extLst>
               <a:ext uri="{FF2B5EF4-FFF2-40B4-BE49-F238E27FC236}">
-                <a16:creationId xmlns:a16="http://schemas.microsoft.com/office/drawing/2014/main" id="{AB514304-4C4E-0ECA-45E1-B39655BA751B}"/>
+                <a16:creationId xmlns:a16="http://schemas.microsoft.com/office/drawing/2014/main" xmlns="" id="{AB514304-4C4E-0ECA-45E1-B39655BA751B}"/>
               </a:ext>
             </a:extLst>
           </p:cNvPr>
@@ -10509,6 +10641,28 @@
           </a:p>
         </p:txBody>
       </p:sp>
+      <p:graphicFrame>
+        <p:nvGraphicFramePr>
+          <p:cNvPr id="8" name="Chart 7"/>
+          <p:cNvGraphicFramePr/>
+          <p:nvPr>
+            <p:extLst>
+              <p:ext uri="{D42A27DB-BD31-4B8C-83A1-F6EECF244321}">
+                <p14:modId xmlns:p14="http://schemas.microsoft.com/office/powerpoint/2010/main" val="805222847"/>
+              </p:ext>
+            </p:extLst>
+          </p:nvPr>
+        </p:nvGraphicFramePr>
+        <p:xfrm>
+          <a:off x="1663865" y="1709057"/>
+          <a:ext cx="7883896" cy="4429276"/>
+        </p:xfrm>
+        <a:graphic>
+          <a:graphicData uri="http://schemas.openxmlformats.org/drawingml/2006/chart">
+            <c:chart xmlns:c="http://schemas.openxmlformats.org/drawingml/2006/chart" xmlns:r="http://schemas.openxmlformats.org/officeDocument/2006/relationships" r:id="rId2"/>
+          </a:graphicData>
+        </a:graphic>
+      </p:graphicFrame>
     </p:spTree>
     <p:extLst>
       <p:ext uri="{BB962C8B-B14F-4D97-AF65-F5344CB8AC3E}">
@@ -10535,7 +10689,7 @@
 </file>
 
 <file path=ppt/slides/slide13.xml><?xml version="1.0" encoding="utf-8"?>
-<p:sld xmlns:a="http://schemas.openxmlformats.org/drawingml/2006/main" xmlns:r="http://schemas.openxmlformats.org/officeDocument/2006/relationships" xmlns:p="http://schemas.openxmlformats.org/presentationml/2006/main">
+<p:sld xmlns:a="http://schemas.openxmlformats.org/drawingml/2006/main" xmlns:r="http://schemas.openxmlformats.org/officeDocument/2006/relationships" xmlns:p="http://schemas.openxmlformats.org/presentationml/2006/main" showMasterSp="0">
   <p:cSld>
     <p:spTree>
       <p:nvGrpSpPr>
@@ -10556,7 +10710,7 @@
           <p:cNvPr id="2" name="Title 1">
             <a:extLst>
               <a:ext uri="{FF2B5EF4-FFF2-40B4-BE49-F238E27FC236}">
-                <a16:creationId xmlns:a16="http://schemas.microsoft.com/office/drawing/2014/main" id="{BB6B82CC-E494-9EF6-C9AC-D2B5F9B0AE7C}"/>
+                <a16:creationId xmlns:a16="http://schemas.microsoft.com/office/drawing/2014/main" xmlns="" id="{BB6B82CC-E494-9EF6-C9AC-D2B5F9B0AE7C}"/>
               </a:ext>
             </a:extLst>
           </p:cNvPr>
@@ -10579,24 +10733,12 @@
           <a:p>
             <a:pPr algn="ctr"/>
             <a:r>
-              <a:rPr lang="en-US" sz="11500" b="1" u="sng" dirty="0">
+              <a:rPr lang="en-US" sz="8000" b="1" dirty="0">
                 <a:solidFill>
-                  <a:srgbClr val="FF0000"/>
+                  <a:schemeClr val="tx1"/>
                 </a:solidFill>
               </a:rPr>
-              <a:t>Thank</a:t>
-            </a:r>
-            <a:r>
-              <a:rPr lang="en-US" sz="11500" b="1" dirty="0"/>
-              <a:t> </a:t>
-            </a:r>
-            <a:r>
-              <a:rPr lang="en-US" sz="11500" b="1" u="sng" dirty="0">
-                <a:solidFill>
-                  <a:srgbClr val="FF0000"/>
-                </a:solidFill>
-              </a:rPr>
-              <a:t>You</a:t>
+              <a:t>Thank You</a:t>
             </a:r>
           </a:p>
         </p:txBody>
@@ -10648,7 +10790,7 @@
           <p:cNvPr id="2" name="Title 1">
             <a:extLst>
               <a:ext uri="{FF2B5EF4-FFF2-40B4-BE49-F238E27FC236}">
-                <a16:creationId xmlns:a16="http://schemas.microsoft.com/office/drawing/2014/main" id="{71416FE9-A981-6982-E51B-25DA9E13A151}"/>
+                <a16:creationId xmlns:a16="http://schemas.microsoft.com/office/drawing/2014/main" xmlns="" id="{71416FE9-A981-6982-E51B-25DA9E13A151}"/>
               </a:ext>
             </a:extLst>
           </p:cNvPr>
@@ -10674,6 +10816,10 @@
               <a:rPr lang="en-US" b="1" u="sng" dirty="0"/>
               <a:t>Introduction</a:t>
             </a:r>
+            <a:r>
+              <a:rPr lang="en-US" dirty="0"/>
+              <a:t/>
+            </a:r>
             <a:br>
               <a:rPr lang="en-US" dirty="0"/>
             </a:br>
@@ -10686,7 +10832,7 @@
           <p:cNvPr id="3" name="Content Placeholder 2">
             <a:extLst>
               <a:ext uri="{FF2B5EF4-FFF2-40B4-BE49-F238E27FC236}">
-                <a16:creationId xmlns:a16="http://schemas.microsoft.com/office/drawing/2014/main" id="{5F669B44-4DF2-1437-B350-A64EDF2B95F6}"/>
+                <a16:creationId xmlns:a16="http://schemas.microsoft.com/office/drawing/2014/main" xmlns="" id="{5F669B44-4DF2-1437-B350-A64EDF2B95F6}"/>
               </a:ext>
             </a:extLst>
           </p:cNvPr>
@@ -10700,12 +10846,12 @@
         <p:spPr>
           <a:xfrm>
             <a:off x="114299" y="1306286"/>
-            <a:ext cx="11936187" cy="5431971"/>
+            <a:ext cx="11936187" cy="4928259"/>
           </a:xfrm>
         </p:spPr>
         <p:txBody>
           <a:bodyPr>
-            <a:normAutofit fontScale="32500" lnSpcReduction="20000"/>
+            <a:normAutofit fontScale="40000" lnSpcReduction="20000"/>
           </a:bodyPr>
           <a:lstStyle/>
           <a:p>
@@ -10729,9 +10875,9 @@
               <a:buNone/>
             </a:pPr>
             <a:r>
-              <a:rPr lang="en-US" sz="6200" b="1" dirty="0">
+              <a:rPr lang="en-US" sz="5000" b="1" dirty="0">
                 <a:solidFill>
-                  <a:srgbClr val="FF0000"/>
+                  <a:srgbClr val="7FFFD4"/>
                 </a:solidFill>
               </a:rPr>
               <a:t>Short-Form Video Dominance:</a:t>
@@ -10746,8 +10892,48 @@
               <a:buChar char="v"/>
             </a:pPr>
             <a:r>
+              <a:rPr lang="en-US" sz="5000" dirty="0" smtClean="0"/>
+              <a:t>Platforms like TikTok</a:t>
+            </a:r>
+            <a:r>
+              <a:rPr lang="en-US" sz="5000" dirty="0"/>
+              <a:t>, Instagram Reels, and YouTube Shorts </a:t>
+            </a:r>
+            <a:r>
+              <a:rPr lang="en-US" sz="5000" dirty="0" smtClean="0"/>
+              <a:t>are highly popular</a:t>
+            </a:r>
+            <a:r>
+              <a:rPr lang="en-US" sz="5000" dirty="0"/>
+              <a:t>.</a:t>
+            </a:r>
+            <a:r>
+              <a:rPr lang="en-US" sz="5000" dirty="0" smtClean="0"/>
+              <a:t> </a:t>
+            </a:r>
+            <a:r>
+              <a:rPr lang="en-US" sz="5000" dirty="0"/>
+              <a:t>B</a:t>
+            </a:r>
+            <a:r>
+              <a:rPr lang="en-US" sz="5000" dirty="0" smtClean="0"/>
+              <a:t>usinesses need to </a:t>
+            </a:r>
+            <a:r>
+              <a:rPr lang="en-US" sz="5000" dirty="0"/>
+              <a:t>create </a:t>
+            </a:r>
+            <a:r>
+              <a:rPr lang="en-US" sz="5000" dirty="0" smtClean="0"/>
+              <a:t>short, engaging video content</a:t>
+            </a:r>
+            <a:r>
+              <a:rPr lang="en-US" sz="5000" dirty="0"/>
+              <a:t>.</a:t>
+            </a:r>
+            <a:r>
               <a:rPr lang="en-US" sz="6200" dirty="0"/>
-              <a:t>Platforms like TikTok, Instagram Reels, and YouTube Shorts continue to be extremely popular, driving the need for businesses to create engaging, bite-sized video content. </a:t>
+              <a:t> </a:t>
             </a:r>
           </a:p>
           <a:p>
@@ -10758,18 +10944,29 @@
               <a:buNone/>
             </a:pPr>
             <a:r>
+              <a:rPr lang="en-US" sz="5000" b="1" dirty="0">
+                <a:solidFill>
+                  <a:srgbClr val="7FFFD4"/>
+                </a:solidFill>
+              </a:rPr>
+              <a:t>Micro-Influencer</a:t>
+            </a:r>
+            <a:r>
               <a:rPr lang="en-US" sz="6200" b="1" dirty="0">
                 <a:solidFill>
-                  <a:srgbClr val="FF0000"/>
+                  <a:srgbClr val="7FFFD4"/>
                 </a:solidFill>
               </a:rPr>
-              <a:t>Micro-Influencer Power:</a:t>
-            </a:r>
-            <a:endParaRPr lang="en-US" sz="6200" dirty="0">
-              <a:solidFill>
-                <a:srgbClr val="FF0000"/>
-              </a:solidFill>
-            </a:endParaRPr>
+              <a:t> </a:t>
+            </a:r>
+            <a:r>
+              <a:rPr lang="en-US" sz="5000" b="1" dirty="0">
+                <a:solidFill>
+                  <a:srgbClr val="7FFFD4"/>
+                </a:solidFill>
+              </a:rPr>
+              <a:t>Power:</a:t>
+            </a:r>
           </a:p>
           <a:p>
             <a:pPr fontAlgn="ctr">
@@ -10780,8 +10977,12 @@
               <a:buChar char="v"/>
             </a:pPr>
             <a:r>
-              <a:rPr lang="en-US" sz="6200" dirty="0"/>
-              <a:t>Micro-influencers, with their smaller, highly engaged audiences, are gaining more traction, offering businesses more authentic and cost-effective ways to reach specific demographics. </a:t>
+              <a:rPr lang="en-US" sz="5000" dirty="0" smtClean="0"/>
+              <a:t>Micro-influencers have a strong and authentic connection with their audience, which makes marketing more genuine and effective.</a:t>
+            </a:r>
+            <a:r>
+              <a:rPr lang="en-US" sz="5000" dirty="0"/>
+              <a:t> </a:t>
             </a:r>
           </a:p>
           <a:p>
@@ -10792,16 +10993,24 @@
               <a:buNone/>
             </a:pPr>
             <a:r>
-              <a:rPr lang="en-US" sz="6200" b="1" dirty="0">
+              <a:rPr lang="en-US" sz="5000" b="1" dirty="0">
                 <a:solidFill>
-                  <a:srgbClr val="FF0000"/>
+                  <a:srgbClr val="7FFFD4"/>
                 </a:solidFill>
               </a:rPr>
-              <a:t>Social Commerce Explosion:</a:t>
-            </a:r>
-            <a:endParaRPr lang="en-US" sz="6200" dirty="0">
+              <a:t>Social Commerce </a:t>
+            </a:r>
+            <a:r>
+              <a:rPr lang="en-US" sz="5000" b="1" dirty="0">
+                <a:solidFill>
+                  <a:srgbClr val="7FFFD4"/>
+                </a:solidFill>
+              </a:rPr>
+              <a:t>Growth:</a:t>
+            </a:r>
+            <a:endParaRPr lang="en-US" sz="5000" b="1" dirty="0">
               <a:solidFill>
-                <a:srgbClr val="FF0000"/>
+                <a:srgbClr val="7FFFD4"/>
               </a:solidFill>
             </a:endParaRPr>
           </a:p>
@@ -10814,8 +11023,20 @@
               <a:buChar char="v"/>
             </a:pPr>
             <a:r>
-              <a:rPr lang="en-US" sz="6200" dirty="0"/>
-              <a:t>Social commerce is becoming a primary revenue source for many businesses, with platforms like Facebook and Instagram integrating shopping features and enabling direct transactions. </a:t>
+              <a:rPr lang="en-US" sz="5000" dirty="0" smtClean="0"/>
+              <a:t>Platforms </a:t>
+            </a:r>
+            <a:r>
+              <a:rPr lang="en-US" sz="5000" dirty="0"/>
+              <a:t>like Facebook and Instagram now offer direct shopping features, which helps in increasing sales and customer engagement</a:t>
+            </a:r>
+            <a:r>
+              <a:rPr lang="en-US" sz="5000" dirty="0" smtClean="0"/>
+              <a:t>.</a:t>
+            </a:r>
+            <a:r>
+              <a:rPr lang="en-US" sz="5000" dirty="0" smtClean="0"/>
+              <a:t> </a:t>
             </a:r>
           </a:p>
           <a:p>
@@ -10826,9 +11047,9 @@
               <a:buNone/>
             </a:pPr>
             <a:r>
-              <a:rPr lang="en-US" sz="6200" b="1" dirty="0">
+              <a:rPr lang="en-US" sz="5000" b="1" dirty="0">
                 <a:solidFill>
-                  <a:srgbClr val="FF0000"/>
+                  <a:srgbClr val="7FFFD4"/>
                 </a:solidFill>
               </a:rPr>
               <a:t>AI Integration:</a:t>
@@ -10843,18 +11064,22 @@
               <a:buChar char="v"/>
             </a:pPr>
             <a:r>
-              <a:rPr lang="en-US" sz="6200" dirty="0"/>
-              <a:t>Social media platforms are increasingly incorporating AI features for content creation, personalized recommendations, and customer support, requiring businesses to adapt to these technological advancements. </a:t>
-            </a:r>
-          </a:p>
-          <a:p>
-            <a:pPr marL="0" indent="0">
-              <a:buClr>
-                <a:schemeClr val="tx1"/>
-              </a:buClr>
-              <a:buNone/>
-            </a:pPr>
-            <a:endParaRPr lang="en-US" dirty="0"/>
+              <a:rPr lang="en-US" sz="4200" dirty="0" smtClean="0"/>
+              <a:t>The </a:t>
+            </a:r>
+            <a:r>
+              <a:rPr lang="en-US" sz="4200" dirty="0"/>
+              <a:t>use of AI is growing rapidly for content creation, personalized recommendations, and customer </a:t>
+            </a:r>
+            <a:r>
+              <a:rPr lang="en-US" sz="4200" dirty="0" smtClean="0"/>
+              <a:t>support.</a:t>
+            </a:r>
+            <a:r>
+              <a:rPr lang="en-US" sz="4200" dirty="0" smtClean="0"/>
+              <a:t> </a:t>
+            </a:r>
+            <a:endParaRPr lang="en-US" sz="1300" dirty="0"/>
           </a:p>
         </p:txBody>
       </p:sp>
@@ -10884,7 +11109,7 @@
 </file>
 
 <file path=ppt/slides/slide3.xml><?xml version="1.0" encoding="utf-8"?>
-<p:sld xmlns:a="http://schemas.openxmlformats.org/drawingml/2006/main" xmlns:r="http://schemas.openxmlformats.org/officeDocument/2006/relationships" xmlns:p="http://schemas.openxmlformats.org/presentationml/2006/main">
+<p:sld xmlns:a="http://schemas.openxmlformats.org/drawingml/2006/main" xmlns:r="http://schemas.openxmlformats.org/officeDocument/2006/relationships" xmlns:p="http://schemas.openxmlformats.org/presentationml/2006/main" showMasterSp="0">
   <p:cSld>
     <p:spTree>
       <p:nvGrpSpPr>
@@ -10905,7 +11130,7 @@
           <p:cNvPr id="3" name="TextBox 2">
             <a:extLst>
               <a:ext uri="{FF2B5EF4-FFF2-40B4-BE49-F238E27FC236}">
-                <a16:creationId xmlns:a16="http://schemas.microsoft.com/office/drawing/2014/main" id="{FE7BEA54-FFFD-A9B7-4D18-44E6DAEB991B}"/>
+                <a16:creationId xmlns:a16="http://schemas.microsoft.com/office/drawing/2014/main" xmlns="" id="{FE7BEA54-FFFD-A9B7-4D18-44E6DAEB991B}"/>
               </a:ext>
             </a:extLst>
           </p:cNvPr>
@@ -10915,7 +11140,7 @@
         <p:spPr>
           <a:xfrm>
             <a:off x="342900" y="620485"/>
-            <a:ext cx="11506200" cy="5786199"/>
+            <a:ext cx="11506200" cy="5478423"/>
           </a:xfrm>
           <a:prstGeom prst="rect">
             <a:avLst/>
@@ -10937,16 +11162,14 @@
             <a:r>
               <a:rPr lang="en-US" sz="2000" b="1" dirty="0">
                 <a:solidFill>
-                  <a:srgbClr val="FF0000"/>
+                  <a:srgbClr val="7FFFD4"/>
                 </a:solidFill>
+                <a:latin typeface="+mj-lt"/>
+                <a:ea typeface="+mj-ea"/>
+                <a:cs typeface="+mj-cs"/>
               </a:rPr>
               <a:t>Increased Brand Awareness and Engagement:</a:t>
             </a:r>
-            <a:endParaRPr lang="en-US" sz="2000" dirty="0">
-              <a:solidFill>
-                <a:srgbClr val="FF0000"/>
-              </a:solidFill>
-            </a:endParaRPr>
           </a:p>
           <a:p>
             <a:pPr marL="285750" indent="-285750" fontAlgn="ctr">
@@ -10954,16 +11177,24 @@
               <a:buChar char="v"/>
             </a:pPr>
             <a:r>
+              <a:rPr lang="en-US" sz="2000" dirty="0" smtClean="0"/>
+              <a:t>Social </a:t>
+            </a:r>
+            <a:r>
               <a:rPr lang="en-US" sz="2000" dirty="0"/>
-              <a:t>Social media provides businesses with a powerful platform to reach a vast audience and build brand awareness through engaging content and targeted advertising. </a:t>
-            </a:r>
+              <a:t>media helps businesses reach a large audience and build brand awareness through engaging content and targeted ads.</a:t>
+            </a:r>
+            <a:endParaRPr lang="en-US" sz="2000" dirty="0"/>
           </a:p>
           <a:p>
             <a:r>
               <a:rPr lang="en-US" sz="2000" b="1" dirty="0">
                 <a:solidFill>
-                  <a:srgbClr val="FF0000"/>
+                  <a:srgbClr val="7FFFD4"/>
                 </a:solidFill>
+                <a:latin typeface="+mj-lt"/>
+                <a:ea typeface="+mj-ea"/>
+                <a:cs typeface="+mj-cs"/>
               </a:rPr>
               <a:t>Improved Customer Service:</a:t>
             </a:r>
@@ -10974,24 +11205,42 @@
               <a:buChar char="v"/>
             </a:pPr>
             <a:r>
+              <a:rPr lang="en-US" sz="2000" dirty="0" smtClean="0"/>
+              <a:t>It </a:t>
+            </a:r>
+            <a:r>
               <a:rPr lang="en-US" sz="2000" dirty="0"/>
-              <a:t>Social media allows for real-time customer engagement, enabling businesses to address queries and concerns promptly, leading to increased customer satisfaction. </a:t>
-            </a:r>
-          </a:p>
-          <a:p>
+              <a:t>allows real-time interaction with customers, helping businesses solve queries quickly and increase satisfaction</a:t>
+            </a:r>
+            <a:r>
+              <a:rPr lang="en-US" sz="2000" dirty="0" smtClean="0"/>
+              <a:t>.</a:t>
+            </a:r>
+          </a:p>
+          <a:p>
+            <a:pPr fontAlgn="ctr"/>
+            <a:r>
+              <a:rPr lang="en-US" sz="2000" b="1" dirty="0" smtClean="0">
+                <a:solidFill>
+                  <a:srgbClr val="7FFFD4"/>
+                </a:solidFill>
+                <a:latin typeface="+mj-lt"/>
+                <a:ea typeface="+mj-ea"/>
+                <a:cs typeface="+mj-cs"/>
+              </a:rPr>
+              <a:t>Enhanced </a:t>
+            </a:r>
             <a:r>
               <a:rPr lang="en-US" sz="2000" b="1" dirty="0">
                 <a:solidFill>
-                  <a:srgbClr val="FF0000"/>
+                  <a:srgbClr val="7FFFD4"/>
                 </a:solidFill>
+                <a:latin typeface="+mj-lt"/>
+                <a:ea typeface="+mj-ea"/>
+                <a:cs typeface="+mj-cs"/>
               </a:rPr>
-              <a:t>Enhanced Targeted Advertising:</a:t>
-            </a:r>
-            <a:endParaRPr lang="en-US" sz="2000" dirty="0">
-              <a:solidFill>
-                <a:srgbClr val="FF0000"/>
-              </a:solidFill>
-            </a:endParaRPr>
+              <a:t>Targeted Advertising:</a:t>
+            </a:r>
           </a:p>
           <a:p>
             <a:pPr marL="285750" indent="-285750" fontAlgn="ctr">
@@ -11000,29 +11249,24 @@
             </a:pPr>
             <a:r>
               <a:rPr lang="en-US" sz="2000" dirty="0"/>
-              <a:t>Social media platforms offer sophisticated targeting options, allowing businesses to reach specific demographics and interests with their advertising campaigns. </a:t>
+              <a:t>Platforms offer advanced targeting options to reach specific demographics and interests with ad campaigns.</a:t>
+            </a:r>
+            <a:r>
+              <a:rPr lang="en-US" sz="2000" dirty="0"/>
+              <a:t> </a:t>
             </a:r>
           </a:p>
           <a:p>
             <a:r>
               <a:rPr lang="en-US" sz="2000" b="1" dirty="0">
                 <a:solidFill>
-                  <a:srgbClr val="FF0000"/>
+                  <a:srgbClr val="7FFFD4"/>
                 </a:solidFill>
+                <a:latin typeface="+mj-lt"/>
+                <a:ea typeface="+mj-ea"/>
+                <a:cs typeface="+mj-cs"/>
               </a:rPr>
-              <a:t>Increased</a:t>
-            </a:r>
-            <a:r>
-              <a:rPr lang="en-US" sz="2000" b="1" dirty="0"/>
-              <a:t> </a:t>
-            </a:r>
-            <a:r>
-              <a:rPr lang="en-US" sz="2000" b="1" dirty="0">
-                <a:solidFill>
-                  <a:srgbClr val="FF0000"/>
-                </a:solidFill>
-              </a:rPr>
-              <a:t>Sales and Revenue:</a:t>
+              <a:t>Increased Sales and Revenue:</a:t>
             </a:r>
           </a:p>
           <a:p>
@@ -11032,15 +11276,22 @@
             </a:pPr>
             <a:r>
               <a:rPr lang="en-US" sz="2000" dirty="0"/>
-              <a:t>Social commerce features and the ability to track product discovery and purchase decisions directly through social media are driving sales and revenue growth for businesses. </a:t>
+              <a:t>Social commerce features help customers discover and purchase products directly, driving sales growth.</a:t>
+            </a:r>
+            <a:r>
+              <a:rPr lang="en-US" sz="2000" dirty="0"/>
+              <a:t> </a:t>
             </a:r>
           </a:p>
           <a:p>
             <a:r>
               <a:rPr lang="en-US" sz="2000" b="1" dirty="0">
                 <a:solidFill>
-                  <a:srgbClr val="FF0000"/>
+                  <a:srgbClr val="7FFFD4"/>
                 </a:solidFill>
+                <a:latin typeface="+mj-lt"/>
+                <a:ea typeface="+mj-ea"/>
+                <a:cs typeface="+mj-cs"/>
               </a:rPr>
               <a:t>Need for Adaptability:</a:t>
             </a:r>
@@ -11052,7 +11303,11 @@
             </a:pPr>
             <a:r>
               <a:rPr lang="en-US" sz="2000" dirty="0"/>
-              <a:t>Businesses must continuously adapt to the evolving social media landscape, staying informed about new trends and technologies to remain competitive. </a:t>
+              <a:t>Businesses must adapt to changing trends and technologies to stay competitive in the market.</a:t>
+            </a:r>
+            <a:r>
+              <a:rPr lang="en-US" sz="2000" dirty="0"/>
+              <a:t> </a:t>
             </a:r>
           </a:p>
           <a:p>
@@ -11111,7 +11366,7 @@
           <p:cNvPr id="2" name="Title 1">
             <a:extLst>
               <a:ext uri="{FF2B5EF4-FFF2-40B4-BE49-F238E27FC236}">
-                <a16:creationId xmlns:a16="http://schemas.microsoft.com/office/drawing/2014/main" id="{0D5E47B8-BA39-0AA3-E962-E3B00993E144}"/>
+                <a16:creationId xmlns:a16="http://schemas.microsoft.com/office/drawing/2014/main" xmlns="" id="{0D5E47B8-BA39-0AA3-E962-E3B00993E144}"/>
               </a:ext>
             </a:extLst>
           </p:cNvPr>
@@ -11145,7 +11400,7 @@
           <p:cNvPr id="7" name="Content Placeholder 6">
             <a:extLst>
               <a:ext uri="{FF2B5EF4-FFF2-40B4-BE49-F238E27FC236}">
-                <a16:creationId xmlns:a16="http://schemas.microsoft.com/office/drawing/2014/main" id="{D9E344E3-062E-FB96-1C37-036F7A8C52E6}"/>
+                <a16:creationId xmlns:a16="http://schemas.microsoft.com/office/drawing/2014/main" xmlns="" id="{D9E344E3-062E-FB96-1C37-036F7A8C52E6}"/>
               </a:ext>
             </a:extLst>
           </p:cNvPr>
@@ -11159,7 +11414,7 @@
         <p:spPr>
           <a:xfrm>
             <a:off x="136071" y="1240971"/>
-            <a:ext cx="11919857" cy="5617029"/>
+            <a:ext cx="11919857" cy="4922323"/>
           </a:xfrm>
         </p:spPr>
         <p:txBody>
@@ -11169,15 +11424,18 @@
           <a:lstStyle/>
           <a:p>
             <a:pPr marL="0" indent="0">
+              <a:lnSpc>
+                <a:spcPct val="150000"/>
+              </a:lnSpc>
               <a:buClr>
                 <a:schemeClr val="tx1"/>
               </a:buClr>
               <a:buNone/>
             </a:pPr>
             <a:r>
-              <a:rPr lang="en-US" sz="3500" b="1" dirty="0">
+              <a:rPr lang="en-US" b="1" dirty="0">
                 <a:solidFill>
-                  <a:srgbClr val="FF0000"/>
+                  <a:srgbClr val="7FFFD4"/>
                 </a:solidFill>
               </a:rPr>
               <a:t>Total users and usage time</a:t>
@@ -11185,6 +11443,9 @@
           </a:p>
           <a:p>
             <a:pPr>
+              <a:lnSpc>
+                <a:spcPct val="150000"/>
+              </a:lnSpc>
               <a:buClr>
                 <a:schemeClr val="tx1"/>
               </a:buClr>
@@ -11194,11 +11455,15 @@
             </a:pPr>
             <a:r>
               <a:rPr lang="en-US" dirty="0"/>
-              <a:t>There are approximately 5.24 billion social media users worldwide as of 2025.</a:t>
-            </a:r>
+              <a:t>Approx 5.24 billion social media users worldwide as of 2025.</a:t>
+            </a:r>
+            <a:endParaRPr lang="en-US" dirty="0"/>
           </a:p>
           <a:p>
             <a:pPr lvl="0">
+              <a:lnSpc>
+                <a:spcPct val="150000"/>
+              </a:lnSpc>
               <a:buClr>
                 <a:schemeClr val="tx1"/>
               </a:buClr>
@@ -11207,11 +11472,15 @@
             </a:pPr>
             <a:r>
               <a:rPr lang="en-US" dirty="0"/>
-              <a:t>The number of social media users continues to rise, with 241 million new users joining since last year, reflecting a 4.7% annual growth rate.</a:t>
-            </a:r>
+              <a:t>241 million new users joined in last year - 4.7% annual growth.</a:t>
+            </a:r>
+            <a:endParaRPr lang="en-US" dirty="0"/>
           </a:p>
           <a:p>
             <a:pPr lvl="0">
+              <a:lnSpc>
+                <a:spcPct val="150000"/>
+              </a:lnSpc>
               <a:buClr>
                 <a:schemeClr val="tx1"/>
               </a:buClr>
@@ -11220,29 +11489,28 @@
             </a:pPr>
             <a:r>
               <a:rPr lang="en-US" dirty="0"/>
-              <a:t>The average daily time spent on social media is around 2 hours and 21 minutes, although there's a slight decrease compared to previous years, suggesting a shift towards more intentional usage.</a:t>
-            </a:r>
-          </a:p>
-          <a:p>
-            <a:pPr marL="0" lvl="0" indent="0">
+              <a:t>Average daily time spent is 2 hours 21 minutes</a:t>
+            </a:r>
+            <a:r>
+              <a:rPr lang="en-US" dirty="0" smtClean="0"/>
+              <a:t>.</a:t>
+            </a:r>
+            <a:endParaRPr lang="en-US" dirty="0"/>
+          </a:p>
+          <a:p>
+            <a:pPr marL="0" indent="0">
+              <a:lnSpc>
+                <a:spcPct val="150000"/>
+              </a:lnSpc>
               <a:buClr>
                 <a:schemeClr val="tx1"/>
               </a:buClr>
               <a:buNone/>
             </a:pPr>
-            <a:endParaRPr lang="en-US" sz="1800" dirty="0"/>
-          </a:p>
-          <a:p>
-            <a:pPr marL="0" indent="0">
-              <a:buClr>
-                <a:schemeClr val="tx1"/>
-              </a:buClr>
-              <a:buNone/>
-            </a:pPr>
-            <a:r>
-              <a:rPr lang="en-US" sz="3200" b="1" dirty="0">
+            <a:r>
+              <a:rPr lang="en-US" b="1" dirty="0">
                 <a:solidFill>
-                  <a:srgbClr val="FF0000"/>
+                  <a:srgbClr val="7FFFD4"/>
                 </a:solidFill>
               </a:rPr>
               <a:t>Top platforms</a:t>
@@ -11250,6 +11518,9 @@
           </a:p>
           <a:p>
             <a:pPr lvl="0">
+              <a:lnSpc>
+                <a:spcPct val="150000"/>
+              </a:lnSpc>
               <a:buClr>
                 <a:schemeClr val="tx1"/>
               </a:buClr>
@@ -11258,11 +11529,15 @@
             </a:pPr>
             <a:r>
               <a:rPr lang="en-US" dirty="0"/>
-              <a:t>Facebook remains the largest social media platform in terms of user numbers, with over 3.07 billion users.</a:t>
-            </a:r>
+              <a:t>Facebook is largest with 3.07 billion users.</a:t>
+            </a:r>
+            <a:endParaRPr lang="en-US" dirty="0"/>
           </a:p>
           <a:p>
             <a:pPr lvl="0">
+              <a:lnSpc>
+                <a:spcPct val="150000"/>
+              </a:lnSpc>
               <a:buClr>
                 <a:schemeClr val="tx1"/>
               </a:buClr>
@@ -11271,11 +11546,15 @@
             </a:pPr>
             <a:r>
               <a:rPr lang="en-US" dirty="0"/>
-              <a:t>YouTube holds the second spot with 2.53 billion users.</a:t>
-            </a:r>
+              <a:t>YouTube is second with 2.53 billion users.</a:t>
+            </a:r>
+            <a:endParaRPr lang="en-US" dirty="0"/>
           </a:p>
           <a:p>
             <a:pPr lvl="0">
+              <a:lnSpc>
+                <a:spcPct val="150000"/>
+              </a:lnSpc>
               <a:buClr>
                 <a:schemeClr val="tx1"/>
               </a:buClr>
@@ -11284,11 +11563,15 @@
             </a:pPr>
             <a:r>
               <a:rPr lang="en-US" dirty="0"/>
-              <a:t>Instagram and WhatsApp are tied in third place, each boasting 2.0 billion users.</a:t>
-            </a:r>
+              <a:t> Instagram &amp; WhatsApp tied at third with 2.0 billion users each.</a:t>
+            </a:r>
+            <a:endParaRPr lang="en-US" dirty="0"/>
           </a:p>
           <a:p>
             <a:pPr lvl="0">
+              <a:lnSpc>
+                <a:spcPct val="150000"/>
+              </a:lnSpc>
               <a:buClr>
                 <a:schemeClr val="tx1"/>
               </a:buClr>
@@ -11297,11 +11580,18 @@
             </a:pPr>
             <a:r>
               <a:rPr lang="en-US" dirty="0"/>
-              <a:t>Other prominent platforms include TikTok (1.59 billion users), WeChat (1.38 billion users), and Telegram (950 million users).  </a:t>
+              <a:t>Other major platforms: TikTok (1.59B), WeChat (1.38B), Telegram (950M).</a:t>
+            </a:r>
+            <a:r>
+              <a:rPr lang="en-US" dirty="0"/>
+              <a:t>  </a:t>
             </a:r>
           </a:p>
           <a:p>
             <a:pPr marL="0" indent="0">
+              <a:lnSpc>
+                <a:spcPct val="150000"/>
+              </a:lnSpc>
               <a:buClr>
                 <a:schemeClr val="tx1"/>
               </a:buClr>
@@ -11337,7 +11627,7 @@
 </file>
 
 <file path=ppt/slides/slide5.xml><?xml version="1.0" encoding="utf-8"?>
-<p:sld xmlns:a="http://schemas.openxmlformats.org/drawingml/2006/main" xmlns:r="http://schemas.openxmlformats.org/officeDocument/2006/relationships" xmlns:p="http://schemas.openxmlformats.org/presentationml/2006/main">
+<p:sld xmlns:a="http://schemas.openxmlformats.org/drawingml/2006/main" xmlns:r="http://schemas.openxmlformats.org/officeDocument/2006/relationships" xmlns:p="http://schemas.openxmlformats.org/presentationml/2006/main" showMasterSp="0">
   <p:cSld>
     <p:spTree>
       <p:nvGrpSpPr>
@@ -11358,7 +11648,7 @@
           <p:cNvPr id="4" name="TextBox 3">
             <a:extLst>
               <a:ext uri="{FF2B5EF4-FFF2-40B4-BE49-F238E27FC236}">
-                <a16:creationId xmlns:a16="http://schemas.microsoft.com/office/drawing/2014/main" id="{1A6FD70C-A9FC-2F63-D027-D8021C6E08F8}"/>
+                <a16:creationId xmlns:a16="http://schemas.microsoft.com/office/drawing/2014/main" xmlns="" id="{1A6FD70C-A9FC-2F63-D027-D8021C6E08F8}"/>
               </a:ext>
             </a:extLst>
           </p:cNvPr>
@@ -11368,7 +11658,7 @@
         <p:spPr>
           <a:xfrm>
             <a:off x="119742" y="770759"/>
-            <a:ext cx="11952515" cy="6217087"/>
+            <a:ext cx="11952515" cy="6037487"/>
           </a:xfrm>
           <a:prstGeom prst="rect">
             <a:avLst/>
@@ -11381,104 +11671,188 @@
           </a:bodyPr>
           <a:lstStyle/>
           <a:p>
-            <a:r>
-              <a:rPr lang="en-US" sz="3200" b="1" dirty="0">
+            <a:pPr>
+              <a:lnSpc>
+                <a:spcPct val="200000"/>
+              </a:lnSpc>
+            </a:pPr>
+            <a:r>
+              <a:rPr lang="en-US" sz="2000" b="1" dirty="0">
                 <a:solidFill>
-                  <a:srgbClr val="FF0000"/>
+                  <a:srgbClr val="7FFFD4"/>
                 </a:solidFill>
+                <a:latin typeface="+mj-lt"/>
+                <a:ea typeface="+mj-ea"/>
+                <a:cs typeface="+mj-cs"/>
               </a:rPr>
               <a:t>Growth of video content</a:t>
             </a:r>
           </a:p>
           <a:p>
             <a:pPr marL="285750" lvl="0" indent="-285750">
+              <a:lnSpc>
+                <a:spcPct val="200000"/>
+              </a:lnSpc>
               <a:buFont typeface="Wingdings" panose="05000000000000000000" pitchFamily="2" charset="2"/>
               <a:buChar char="v"/>
             </a:pPr>
             <a:r>
+              <a:rPr lang="en-US" sz="2000" dirty="0" smtClean="0"/>
+              <a:t>Video </a:t>
+            </a:r>
+            <a:r>
               <a:rPr lang="en-US" sz="2000" dirty="0"/>
-              <a:t>Video content continues its dominance in social media, with short-form videos like Instagram Reels, YouTube Shorts, and TikTok leading the charge.</a:t>
-            </a:r>
+              <a:t>content dominates social media, with Reels, YouTube Shorts &amp; TikTok leading</a:t>
+            </a:r>
+            <a:r>
+              <a:rPr lang="en-US" sz="2000" dirty="0" smtClean="0"/>
+              <a:t>.</a:t>
+            </a:r>
+            <a:endParaRPr lang="en-US" sz="2000" dirty="0" smtClean="0"/>
           </a:p>
           <a:p>
             <a:pPr marL="285750" lvl="0" indent="-285750">
+              <a:lnSpc>
+                <a:spcPct val="200000"/>
+              </a:lnSpc>
               <a:buFont typeface="Wingdings" panose="05000000000000000000" pitchFamily="2" charset="2"/>
               <a:buChar char="v"/>
             </a:pPr>
             <a:r>
-              <a:rPr lang="en-US" sz="2000" dirty="0"/>
-              <a:t>Short-form video content is expected to constitute a significant majority of all online content by 2025.</a:t>
-            </a:r>
+              <a:rPr lang="en-US" sz="2000" dirty="0" smtClean="0"/>
+              <a:t>Short-form video will be the majority of all online content by 2025.</a:t>
+            </a:r>
+            <a:endParaRPr lang="en-US" sz="2000" dirty="0" smtClean="0"/>
           </a:p>
           <a:p>
             <a:pPr marL="285750" lvl="0" indent="-285750">
+              <a:lnSpc>
+                <a:spcPct val="200000"/>
+              </a:lnSpc>
               <a:buFont typeface="Wingdings" panose="05000000000000000000" pitchFamily="2" charset="2"/>
               <a:buChar char="v"/>
             </a:pPr>
             <a:r>
+              <a:rPr lang="en-US" sz="2000" dirty="0" smtClean="0"/>
+              <a:t>TikTok </a:t>
+            </a:r>
+            <a:r>
               <a:rPr lang="en-US" sz="2000" dirty="0"/>
-              <a:t>TikTok's average daily usage of 1 hour and 35 minutes makes it the most engaging social app in terms of time spent per day.</a:t>
-            </a:r>
-          </a:p>
-          <a:p>
-            <a:endParaRPr lang="en-US" sz="2000" b="1" dirty="0">
-              <a:solidFill>
-                <a:srgbClr val="FF0000"/>
-              </a:solidFill>
-            </a:endParaRPr>
-          </a:p>
-          <a:p>
-            <a:r>
-              <a:rPr lang="en-US" sz="3200" b="1" dirty="0">
+              <a:t>is most engaging - avg 1 hour 35 mins daily usage</a:t>
+            </a:r>
+            <a:r>
+              <a:rPr lang="en-US" sz="2000" dirty="0" smtClean="0"/>
+              <a:t>.</a:t>
+            </a:r>
+            <a:endParaRPr lang="en-US" sz="2000" b="1" dirty="0" smtClean="0"/>
+          </a:p>
+          <a:p>
+            <a:pPr>
+              <a:lnSpc>
+                <a:spcPct val="200000"/>
+              </a:lnSpc>
+            </a:pPr>
+            <a:r>
+              <a:rPr lang="en-US" sz="2000" b="1" dirty="0" smtClean="0">
                 <a:solidFill>
-                  <a:srgbClr val="FF0000"/>
+                  <a:srgbClr val="7FFFD4"/>
                 </a:solidFill>
+                <a:latin typeface="+mj-lt"/>
+                <a:ea typeface="+mj-ea"/>
+                <a:cs typeface="+mj-cs"/>
               </a:rPr>
-              <a:t>Other notable trends</a:t>
+              <a:t>Other </a:t>
+            </a:r>
+            <a:r>
+              <a:rPr lang="en-US" sz="2000" b="1" dirty="0">
+                <a:solidFill>
+                  <a:srgbClr val="7FFFD4"/>
+                </a:solidFill>
+                <a:latin typeface="+mj-lt"/>
+                <a:ea typeface="+mj-ea"/>
+                <a:cs typeface="+mj-cs"/>
+              </a:rPr>
+              <a:t>notable trends</a:t>
             </a:r>
           </a:p>
           <a:p>
             <a:pPr marL="285750" indent="-285750">
+              <a:lnSpc>
+                <a:spcPct val="200000"/>
+              </a:lnSpc>
               <a:buFont typeface="Wingdings" panose="05000000000000000000" pitchFamily="2" charset="2"/>
               <a:buChar char="v"/>
             </a:pPr>
             <a:r>
+              <a:rPr lang="en-US" sz="2000" b="1" dirty="0"/>
+              <a:t> Authenticity &amp; UGC: </a:t>
+            </a:r>
+            <a:r>
               <a:rPr lang="en-US" sz="2000" dirty="0"/>
-              <a:t>Authenticity and User-Generated Content (UGC): There's a growing demand for raw, unfiltered content and UGC as users connect with relatable and transparent brands.</a:t>
-            </a:r>
-          </a:p>
-          <a:p>
-            <a:pPr marL="285750" indent="-285750">
-              <a:buFont typeface="Wingdings" panose="05000000000000000000" pitchFamily="2" charset="2"/>
-              <a:buChar char="v"/>
+              <a:t>Users prefer raw, unfiltered content from real people</a:t>
+            </a:r>
+            <a:r>
+              <a:rPr lang="en-US" sz="2000" dirty="0" smtClean="0"/>
+              <a:t>.</a:t>
+            </a:r>
+          </a:p>
+          <a:p>
+            <a:pPr>
+              <a:lnSpc>
+                <a:spcPct val="200000"/>
+              </a:lnSpc>
             </a:pPr>
             <a:r>
+              <a:rPr lang="en-US" sz="2000" dirty="0" smtClean="0"/>
+              <a:t>❖ </a:t>
+            </a:r>
+            <a:r>
+              <a:rPr lang="en-US" sz="2000" b="1" dirty="0"/>
+              <a:t>Influencer Marketing: </a:t>
+            </a:r>
+            <a:r>
               <a:rPr lang="en-US" sz="2000" dirty="0"/>
-              <a:t>Influencer Marketing: While the overall market continues to expand, there's a shift towards nano- and micro-influencers who offer higher engagement and authenticity compared to celebrity influencers.</a:t>
-            </a:r>
-          </a:p>
-          <a:p>
-            <a:pPr marL="285750" indent="-285750">
-              <a:buFont typeface="Wingdings" panose="05000000000000000000" pitchFamily="2" charset="2"/>
-              <a:buChar char="v"/>
+              <a:t>Shift towards nano &amp; micro-influencers for better engagement</a:t>
+            </a:r>
+            <a:r>
+              <a:rPr lang="en-US" sz="2000" dirty="0" smtClean="0"/>
+              <a:t>.</a:t>
+            </a:r>
+          </a:p>
+          <a:p>
+            <a:pPr>
+              <a:lnSpc>
+                <a:spcPct val="200000"/>
+              </a:lnSpc>
             </a:pPr>
             <a:r>
+              <a:rPr lang="en-US" sz="2000" dirty="0" smtClean="0"/>
+              <a:t>❖ </a:t>
+            </a:r>
+            <a:r>
+              <a:rPr lang="en-US" sz="2000" b="1" dirty="0"/>
+              <a:t>AI Integrations: </a:t>
+            </a:r>
+            <a:r>
               <a:rPr lang="en-US" sz="2000" dirty="0"/>
-              <a:t>AI Integrations: Social media platforms are incorporating AI features for tasks like ad targeting, content creation, and even customer service interactions.</a:t>
-            </a:r>
-          </a:p>
-          <a:p>
-            <a:pPr lvl="0"/>
+              <a:t>AI is used for ad targeting, content creation &amp; customer service. </a:t>
+            </a:r>
             <a:endParaRPr lang="en-US" dirty="0"/>
           </a:p>
           <a:p>
-            <a:pPr marL="285750" lvl="0" indent="-285750">
-              <a:buFont typeface="Wingdings" panose="05000000000000000000" pitchFamily="2" charset="2"/>
-              <a:buChar char="v"/>
+            <a:pPr lvl="0">
+              <a:lnSpc>
+                <a:spcPct val="200000"/>
+              </a:lnSpc>
             </a:pPr>
             <a:endParaRPr lang="en-US" dirty="0"/>
           </a:p>
           <a:p>
+            <a:pPr>
+              <a:lnSpc>
+                <a:spcPct val="200000"/>
+              </a:lnSpc>
+            </a:pPr>
             <a:endParaRPr lang="en-US" dirty="0"/>
           </a:p>
         </p:txBody>
@@ -11530,7 +11904,7 @@
           <p:cNvPr id="2" name="Title 1">
             <a:extLst>
               <a:ext uri="{FF2B5EF4-FFF2-40B4-BE49-F238E27FC236}">
-                <a16:creationId xmlns:a16="http://schemas.microsoft.com/office/drawing/2014/main" id="{29E01342-8218-8A74-B3ED-0E798EEB542A}"/>
+                <a16:creationId xmlns:a16="http://schemas.microsoft.com/office/drawing/2014/main" xmlns="" id="{29E01342-8218-8A74-B3ED-0E798EEB542A}"/>
               </a:ext>
             </a:extLst>
           </p:cNvPr>
@@ -11564,7 +11938,7 @@
           <p:cNvPr id="3" name="Content Placeholder 2">
             <a:extLst>
               <a:ext uri="{FF2B5EF4-FFF2-40B4-BE49-F238E27FC236}">
-                <a16:creationId xmlns:a16="http://schemas.microsoft.com/office/drawing/2014/main" id="{8BF2C946-8DF2-7723-6C64-517B2EB73624}"/>
+                <a16:creationId xmlns:a16="http://schemas.microsoft.com/office/drawing/2014/main" xmlns="" id="{8BF2C946-8DF2-7723-6C64-517B2EB73624}"/>
               </a:ext>
             </a:extLst>
           </p:cNvPr>
@@ -11583,7 +11957,7 @@
         </p:spPr>
         <p:txBody>
           <a:bodyPr>
-            <a:normAutofit lnSpcReduction="10000"/>
+            <a:normAutofit/>
           </a:bodyPr>
           <a:lstStyle/>
           <a:p>
@@ -11596,7 +11970,11 @@
             </a:pPr>
             <a:r>
               <a:rPr lang="en-US" dirty="0"/>
-              <a:t>In 2025, social media usage continues to be widespread, with varying degrees of adoption across different age groups. </a:t>
+              <a:t>In 2025, social media usage varies across different age groups.</a:t>
+            </a:r>
+            <a:r>
+              <a:rPr lang="en-US" dirty="0"/>
+              <a:t> </a:t>
             </a:r>
           </a:p>
           <a:p>
@@ -11608,26 +11986,12 @@
               <a:buNone/>
             </a:pPr>
             <a:r>
-              <a:rPr lang="en-US" sz="3200" b="1" dirty="0">
+              <a:rPr lang="en-US" b="1" dirty="0">
                 <a:solidFill>
-                  <a:srgbClr val="FF0000"/>
+                  <a:srgbClr val="7FFFD4"/>
                 </a:solidFill>
               </a:rPr>
               <a:t>Young adults and teens (13-29): </a:t>
-            </a:r>
-          </a:p>
-          <a:p>
-            <a:pPr lvl="0">
-              <a:buClr>
-                <a:schemeClr val="tx1"/>
-              </a:buClr>
-              <a:buSzPct val="100000"/>
-              <a:buFont typeface="Wingdings" panose="05000000000000000000" pitchFamily="2" charset="2"/>
-              <a:buChar char="v"/>
-            </a:pPr>
-            <a:r>
-              <a:rPr lang="en-US" dirty="0"/>
-              <a:t>Gen Z (ages 13-24) and Millennials (ages 28-43) remain the most active users, with 95% of Gen Z in the U.S. actively using social media. They predominantly favor platforms like YouTube, Instagram, and TikTok.</a:t>
             </a:r>
           </a:p>
           <a:p>
@@ -11639,26 +12003,12 @@
               <a:buNone/>
             </a:pPr>
             <a:r>
-              <a:rPr lang="en-US" sz="3200" b="1" dirty="0">
-                <a:solidFill>
-                  <a:srgbClr val="FF0000"/>
-                </a:solidFill>
-              </a:rPr>
-              <a:t>Middle-aged adults (30-45): </a:t>
-            </a:r>
-          </a:p>
-          <a:p>
-            <a:pPr lvl="0">
-              <a:buClr>
-                <a:schemeClr val="tx1"/>
-              </a:buClr>
-              <a:buSzPct val="100000"/>
-              <a:buFont typeface="Wingdings" panose="05000000000000000000" pitchFamily="2" charset="2"/>
-              <a:buChar char="v"/>
-            </a:pPr>
-            <a:r>
               <a:rPr lang="en-US" dirty="0"/>
-              <a:t>Usage remains high, with platforms like YouTube, Facebook, and Instagram attracting a significant portion of this demographic.</a:t>
+              <a:t>❖ Most active users - 95% of Gen Z (13-24) in U.S. use social media</a:t>
+            </a:r>
+            <a:r>
+              <a:rPr lang="en-US" dirty="0" smtClean="0"/>
+              <a:t>.</a:t>
             </a:r>
           </a:p>
           <a:p>
@@ -11670,27 +12020,18 @@
               <a:buNone/>
             </a:pPr>
             <a:r>
-              <a:rPr lang="en-US" sz="3200" b="1" dirty="0">
-                <a:solidFill>
-                  <a:srgbClr val="FF0000"/>
-                </a:solidFill>
-              </a:rPr>
-              <a:t>Older adults (46-60+): </a:t>
-            </a:r>
-          </a:p>
-          <a:p>
-            <a:pPr lvl="0">
-              <a:buClr>
-                <a:schemeClr val="tx1"/>
-              </a:buClr>
-              <a:buSzPct val="100000"/>
-              <a:buFont typeface="Wingdings" panose="05000000000000000000" pitchFamily="2" charset="2"/>
-              <a:buChar char="v"/>
-            </a:pPr>
+              <a:rPr lang="en-US" dirty="0" smtClean="0"/>
+              <a:t>❖ </a:t>
+            </a:r>
+            <a:r>
+              <a:rPr lang="en-US" b="1" dirty="0"/>
+              <a:t>Fav platforms: </a:t>
+            </a:r>
             <a:r>
               <a:rPr lang="en-US" dirty="0"/>
-              <a:t>Social media use among this demographic is lower compared to younger groups, but platforms like Facebook and YouTube still see notable engagement. For example, 65% of adults aged 65 and older in the U.S. use YouTube. </a:t>
-            </a:r>
+              <a:t>YouTube, Instagram &amp; TikTok. </a:t>
+            </a:r>
+            <a:endParaRPr lang="en-US" dirty="0" smtClean="0"/>
           </a:p>
           <a:p>
             <a:pPr marL="0" lvl="0" indent="0">
@@ -11700,7 +12041,89 @@
               <a:buSzPct val="100000"/>
               <a:buNone/>
             </a:pPr>
-            <a:endParaRPr lang="en-US" dirty="0"/>
+            <a:r>
+              <a:rPr lang="en-US" b="1" dirty="0" smtClean="0">
+                <a:solidFill>
+                  <a:srgbClr val="7FFFD4"/>
+                </a:solidFill>
+              </a:rPr>
+              <a:t>Middle-aged </a:t>
+            </a:r>
+            <a:r>
+              <a:rPr lang="en-US" b="1" dirty="0">
+                <a:solidFill>
+                  <a:srgbClr val="7FFFD4"/>
+                </a:solidFill>
+              </a:rPr>
+              <a:t>adults (30-45): </a:t>
+            </a:r>
+          </a:p>
+          <a:p>
+            <a:pPr marL="0" lvl="0" indent="0">
+              <a:buClr>
+                <a:schemeClr val="tx1"/>
+              </a:buClr>
+              <a:buSzPct val="100000"/>
+              <a:buNone/>
+            </a:pPr>
+            <a:r>
+              <a:rPr lang="en-US" b="1" dirty="0"/>
+              <a:t>❖ </a:t>
+            </a:r>
+            <a:r>
+              <a:rPr lang="en-US" dirty="0"/>
+              <a:t>Usage remains high</a:t>
+            </a:r>
+            <a:r>
+              <a:rPr lang="en-US" dirty="0" smtClean="0"/>
+              <a:t>.</a:t>
+            </a:r>
+          </a:p>
+          <a:p>
+            <a:pPr marL="0" lvl="0" indent="0">
+              <a:buClr>
+                <a:schemeClr val="tx1"/>
+              </a:buClr>
+              <a:buSzPct val="100000"/>
+              <a:buNone/>
+            </a:pPr>
+            <a:r>
+              <a:rPr lang="en-US" b="1" dirty="0" smtClean="0"/>
+              <a:t>❖ </a:t>
+            </a:r>
+            <a:r>
+              <a:rPr lang="en-US" b="1" dirty="0"/>
+              <a:t>Fav platforms: </a:t>
+            </a:r>
+            <a:r>
+              <a:rPr lang="en-US" dirty="0"/>
+              <a:t>YouTube, Facebook &amp; Instagram.</a:t>
+            </a:r>
+          </a:p>
+          <a:p>
+            <a:pPr marL="0" lvl="0" indent="0">
+              <a:buClr>
+                <a:schemeClr val="tx1"/>
+              </a:buClr>
+              <a:buSzPct val="100000"/>
+              <a:buNone/>
+            </a:pPr>
+            <a:r>
+              <a:rPr lang="en-US" b="1" dirty="0" smtClean="0">
+                <a:solidFill>
+                  <a:srgbClr val="7FFFD4"/>
+                </a:solidFill>
+              </a:rPr>
+              <a:t>Older </a:t>
+            </a:r>
+            <a:r>
+              <a:rPr lang="en-US" b="1" dirty="0">
+                <a:solidFill>
+                  <a:srgbClr val="7FFFD4"/>
+                </a:solidFill>
+              </a:rPr>
+              <a:t>adults (46-60+): </a:t>
+            </a:r>
           </a:p>
           <a:p>
             <a:pPr marL="0" indent="0">
@@ -11710,6 +12133,56 @@
               <a:buSzPct val="100000"/>
               <a:buNone/>
             </a:pPr>
+            <a:r>
+              <a:rPr lang="en-US" dirty="0"/>
+              <a:t>❖ Usage is lower than younger groups but still significant</a:t>
+            </a:r>
+            <a:r>
+              <a:rPr lang="en-US" dirty="0" smtClean="0"/>
+              <a:t>.</a:t>
+            </a:r>
+          </a:p>
+          <a:p>
+            <a:pPr marL="0" indent="0">
+              <a:buClr>
+                <a:schemeClr val="tx1"/>
+              </a:buClr>
+              <a:buSzPct val="100000"/>
+              <a:buNone/>
+            </a:pPr>
+            <a:r>
+              <a:rPr lang="en-US" dirty="0" smtClean="0"/>
+              <a:t>❖ </a:t>
+            </a:r>
+            <a:r>
+              <a:rPr lang="en-US" b="1" dirty="0"/>
+              <a:t>Fav platforms: </a:t>
+            </a:r>
+            <a:r>
+              <a:rPr lang="en-US" dirty="0"/>
+              <a:t>Facebook &amp; YouTube</a:t>
+            </a:r>
+            <a:r>
+              <a:rPr lang="en-US" dirty="0" smtClean="0"/>
+              <a:t>.</a:t>
+            </a:r>
+          </a:p>
+          <a:p>
+            <a:pPr marL="0" indent="0">
+              <a:buClr>
+                <a:schemeClr val="tx1"/>
+              </a:buClr>
+              <a:buSzPct val="100000"/>
+              <a:buNone/>
+            </a:pPr>
+            <a:r>
+              <a:rPr lang="en-US" dirty="0" smtClean="0"/>
+              <a:t>❖ </a:t>
+            </a:r>
+            <a:r>
+              <a:rPr lang="en-US" dirty="0"/>
+              <a:t>65% of adults aged 65+ in U.S. use YouTube.</a:t>
+            </a:r>
             <a:endParaRPr lang="en-US" dirty="0"/>
           </a:p>
         </p:txBody>
@@ -11740,7 +12213,7 @@
 </file>
 
 <file path=ppt/slides/slide7.xml><?xml version="1.0" encoding="utf-8"?>
-<p:sld xmlns:a="http://schemas.openxmlformats.org/drawingml/2006/main" xmlns:r="http://schemas.openxmlformats.org/officeDocument/2006/relationships" xmlns:p="http://schemas.openxmlformats.org/presentationml/2006/main">
+<p:sld xmlns:a="http://schemas.openxmlformats.org/drawingml/2006/main" xmlns:r="http://schemas.openxmlformats.org/officeDocument/2006/relationships" xmlns:p="http://schemas.openxmlformats.org/presentationml/2006/main" showMasterSp="0">
   <p:cSld>
     <p:spTree>
       <p:nvGrpSpPr>
@@ -11761,7 +12234,7 @@
           <p:cNvPr id="5" name="TextBox 4">
             <a:extLst>
               <a:ext uri="{FF2B5EF4-FFF2-40B4-BE49-F238E27FC236}">
-                <a16:creationId xmlns:a16="http://schemas.microsoft.com/office/drawing/2014/main" id="{0C896ACA-FD19-031B-FDA8-454D8876C54A}"/>
+                <a16:creationId xmlns:a16="http://schemas.microsoft.com/office/drawing/2014/main" xmlns="" id="{0C896ACA-FD19-031B-FDA8-454D8876C54A}"/>
               </a:ext>
             </a:extLst>
           </p:cNvPr>
@@ -11771,7 +12244,7 @@
         <p:spPr>
           <a:xfrm>
             <a:off x="250371" y="1186544"/>
-            <a:ext cx="11691257" cy="4985980"/>
+            <a:ext cx="11691257" cy="4493538"/>
           </a:xfrm>
           <a:prstGeom prst="rect">
             <a:avLst/>
@@ -11790,14 +12263,24 @@
             </a:r>
           </a:p>
           <a:p>
-            <a:endParaRPr lang="en-US" sz="2000" dirty="0"/>
-          </a:p>
-          <a:p>
-            <a:r>
-              <a:rPr lang="en-US" sz="2800" b="1" dirty="0">
+            <a:endParaRPr lang="en-US" sz="2000" b="1" dirty="0">
+              <a:solidFill>
+                <a:srgbClr val="7FFFD4"/>
+              </a:solidFill>
+              <a:latin typeface="+mj-lt"/>
+              <a:ea typeface="+mj-ea"/>
+              <a:cs typeface="+mj-cs"/>
+            </a:endParaRPr>
+          </a:p>
+          <a:p>
+            <a:r>
+              <a:rPr lang="en-US" sz="2000" b="1" dirty="0">
                 <a:solidFill>
-                  <a:srgbClr val="FF0000"/>
+                  <a:srgbClr val="7FFFD4"/>
                 </a:solidFill>
+                <a:latin typeface="+mj-lt"/>
+                <a:ea typeface="+mj-ea"/>
+                <a:cs typeface="+mj-cs"/>
               </a:rPr>
               <a:t>Ages 13-18:</a:t>
             </a:r>
@@ -11810,10 +12293,13 @@
           </a:p>
           <a:p>
             <a:r>
-              <a:rPr lang="en-US" sz="2800" b="1" dirty="0">
+              <a:rPr lang="en-US" sz="2000" b="1" dirty="0">
                 <a:solidFill>
-                  <a:srgbClr val="FF0000"/>
+                  <a:srgbClr val="7FFFD4"/>
                 </a:solidFill>
+                <a:latin typeface="+mj-lt"/>
+                <a:ea typeface="+mj-ea"/>
+                <a:cs typeface="+mj-cs"/>
               </a:rPr>
               <a:t>Ages 19-29:</a:t>
             </a:r>
@@ -11826,10 +12312,13 @@
           </a:p>
           <a:p>
             <a:r>
-              <a:rPr lang="en-US" sz="2800" b="1" dirty="0">
+              <a:rPr lang="en-US" sz="2000" b="1" dirty="0">
                 <a:solidFill>
-                  <a:srgbClr val="FF0000"/>
+                  <a:srgbClr val="7FFFD4"/>
                 </a:solidFill>
+                <a:latin typeface="+mj-lt"/>
+                <a:ea typeface="+mj-ea"/>
+                <a:cs typeface="+mj-cs"/>
               </a:rPr>
               <a:t>Ages 30-45:</a:t>
             </a:r>
@@ -11842,26 +12331,43 @@
           </a:p>
           <a:p>
             <a:r>
-              <a:rPr lang="en-US" sz="2800" b="1" dirty="0">
+              <a:rPr lang="en-US" sz="2000" b="1" dirty="0">
                 <a:solidFill>
-                  <a:srgbClr val="FF0000"/>
+                  <a:srgbClr val="7FFFD4"/>
                 </a:solidFill>
+                <a:latin typeface="+mj-lt"/>
+                <a:ea typeface="+mj-ea"/>
+                <a:cs typeface="+mj-cs"/>
               </a:rPr>
               <a:t>Ages 46-60: </a:t>
             </a:r>
           </a:p>
           <a:p>
             <a:r>
+              <a:rPr lang="en-US" sz="2000" b="1" dirty="0">
+                <a:solidFill>
+                  <a:srgbClr val="7FFFD4"/>
+                </a:solidFill>
+                <a:latin typeface="+mj-lt"/>
+                <a:ea typeface="+mj-ea"/>
+                <a:cs typeface="+mj-cs"/>
+              </a:rPr>
+              <a:t>                     </a:t>
+            </a:r>
+            <a:r>
               <a:rPr lang="en-US" sz="2000" dirty="0"/>
-              <a:t>                     54% engage with social media content.</a:t>
-            </a:r>
-          </a:p>
-          <a:p>
-            <a:r>
-              <a:rPr lang="en-US" sz="2800" b="1" dirty="0">
+              <a:t>54% engage with social media content.</a:t>
+            </a:r>
+          </a:p>
+          <a:p>
+            <a:r>
+              <a:rPr lang="en-US" sz="2000" b="1" dirty="0">
                 <a:solidFill>
-                  <a:srgbClr val="FF0000"/>
+                  <a:srgbClr val="7FFFD4"/>
                 </a:solidFill>
+                <a:latin typeface="+mj-lt"/>
+                <a:ea typeface="+mj-ea"/>
+                <a:cs typeface="+mj-cs"/>
               </a:rPr>
               <a:t>Ages 60+: </a:t>
             </a:r>
@@ -11924,7 +12430,7 @@
           <p:cNvPr id="2" name="Title 1">
             <a:extLst>
               <a:ext uri="{FF2B5EF4-FFF2-40B4-BE49-F238E27FC236}">
-                <a16:creationId xmlns:a16="http://schemas.microsoft.com/office/drawing/2014/main" id="{E1052232-7424-4F9D-A4B4-4835E150F3C0}"/>
+                <a16:creationId xmlns:a16="http://schemas.microsoft.com/office/drawing/2014/main" xmlns="" id="{E1052232-7424-4F9D-A4B4-4835E150F3C0}"/>
               </a:ext>
             </a:extLst>
           </p:cNvPr>
@@ -11958,7 +12464,7 @@
           <p:cNvPr id="3" name="Content Placeholder 2">
             <a:extLst>
               <a:ext uri="{FF2B5EF4-FFF2-40B4-BE49-F238E27FC236}">
-                <a16:creationId xmlns:a16="http://schemas.microsoft.com/office/drawing/2014/main" id="{50A9B211-8F2A-1893-3210-BBC4F710336D}"/>
+                <a16:creationId xmlns:a16="http://schemas.microsoft.com/office/drawing/2014/main" xmlns="" id="{50A9B211-8F2A-1893-3210-BBC4F710336D}"/>
               </a:ext>
             </a:extLst>
           </p:cNvPr>
@@ -11972,22 +12478,25 @@
         <p:spPr>
           <a:xfrm>
             <a:off x="81642" y="1208314"/>
-            <a:ext cx="11854543" cy="5519057"/>
+            <a:ext cx="11854543" cy="4990605"/>
           </a:xfrm>
         </p:spPr>
         <p:txBody>
           <a:bodyPr>
-            <a:normAutofit/>
+            <a:normAutofit lnSpcReduction="10000"/>
           </a:bodyPr>
           <a:lstStyle/>
           <a:p>
             <a:pPr marL="0" lvl="0" indent="0">
+              <a:lnSpc>
+                <a:spcPct val="150000"/>
+              </a:lnSpc>
               <a:buNone/>
             </a:pPr>
             <a:r>
-              <a:rPr lang="en-US" sz="3200" b="1" dirty="0">
+              <a:rPr lang="en-US" b="1" dirty="0">
                 <a:solidFill>
-                  <a:srgbClr val="FF0000"/>
+                  <a:srgbClr val="7FFFD4"/>
                 </a:solidFill>
               </a:rPr>
               <a:t>Marketing: </a:t>
@@ -11995,6 +12504,9 @@
           </a:p>
           <a:p>
             <a:pPr lvl="0">
+              <a:lnSpc>
+                <a:spcPct val="150000"/>
+              </a:lnSpc>
               <a:buClr>
                 <a:schemeClr val="tx1"/>
               </a:buClr>
@@ -12003,29 +12515,23 @@
               <a:buChar char="v"/>
             </a:pPr>
             <a:r>
+              <a:rPr lang="en-US" dirty="0" smtClean="0"/>
+              <a:t>Short-form </a:t>
+            </a:r>
+            <a:r>
               <a:rPr lang="en-US" dirty="0"/>
-              <a:t>Short-form video ads are generating impressive engagement rates, with some marketers reporting a 40% increase in engagement. Short-form video ads are projected to hit $100 billion by 2025.</a:t>
-            </a:r>
-          </a:p>
-          <a:p>
-            <a:pPr marL="0" lvl="0" indent="0">
-              <a:buClr>
-                <a:schemeClr val="tx1"/>
-              </a:buClr>
-              <a:buSzPct val="100000"/>
-              <a:buNone/>
-            </a:pPr>
-            <a:r>
-              <a:rPr lang="en-US" sz="3200" b="1" dirty="0">
-                <a:solidFill>
-                  <a:srgbClr val="FF0000"/>
-                </a:solidFill>
-              </a:rPr>
-              <a:t>E-commerce: </a:t>
+              <a:t>video ads giving 40% higher engagement</a:t>
+            </a:r>
+            <a:r>
+              <a:rPr lang="en-US" dirty="0" smtClean="0"/>
+              <a:t>.</a:t>
             </a:r>
           </a:p>
           <a:p>
             <a:pPr lvl="0">
+              <a:lnSpc>
+                <a:spcPct val="150000"/>
+              </a:lnSpc>
               <a:buClr>
                 <a:schemeClr val="tx1"/>
               </a:buClr>
@@ -12034,12 +12540,20 @@
               <a:buChar char="v"/>
             </a:pPr>
             <a:r>
+              <a:rPr lang="en-US" dirty="0" smtClean="0"/>
+              <a:t>Ad </a:t>
+            </a:r>
+            <a:r>
               <a:rPr lang="en-US" dirty="0"/>
-              <a:t>Social commerce is on the rise, with approximately 65% of social media users making purchases directly through platforms like Facebook, Instagram, and TikTok. The global social commerce market is projected to reach $1.2 trillion by 2025.</a:t>
-            </a:r>
+              <a:t>market to hit $100 billion by 2025. </a:t>
+            </a:r>
+            <a:endParaRPr lang="en-US" dirty="0" smtClean="0"/>
           </a:p>
           <a:p>
             <a:pPr marL="0" lvl="0" indent="0">
+              <a:lnSpc>
+                <a:spcPct val="150000"/>
+              </a:lnSpc>
               <a:buClr>
                 <a:schemeClr val="tx1"/>
               </a:buClr>
@@ -12047,16 +12561,27 @@
               <a:buNone/>
             </a:pPr>
             <a:r>
-              <a:rPr lang="en-US" sz="3200" b="1" dirty="0">
+              <a:rPr lang="en-US" b="1" dirty="0" smtClean="0">
                 <a:solidFill>
-                  <a:srgbClr val="FF0000"/>
+                  <a:srgbClr val="7FFFD4"/>
                 </a:solidFill>
               </a:rPr>
-              <a:t>Customer Service:</a:t>
+              <a:t>E-commerce</a:t>
+            </a:r>
+            <a:r>
+              <a:rPr lang="en-US" b="1" dirty="0">
+                <a:solidFill>
+                  <a:srgbClr val="7FFFD4"/>
+                </a:solidFill>
+              </a:rPr>
+              <a:t>: </a:t>
             </a:r>
           </a:p>
           <a:p>
             <a:pPr lvl="0">
+              <a:lnSpc>
+                <a:spcPct val="150000"/>
+              </a:lnSpc>
               <a:buClr>
                 <a:schemeClr val="tx1"/>
               </a:buClr>
@@ -12065,14 +12590,121 @@
               <a:buChar char="v"/>
             </a:pPr>
             <a:r>
+              <a:rPr lang="en-US" dirty="0" smtClean="0"/>
+              <a:t>65</a:t>
+            </a:r>
+            <a:r>
               <a:rPr lang="en-US" dirty="0"/>
-              <a:t> Many companies are leveraging social media to provide more responsive customer service, with some businesses reporting a 30% faster response time compared to traditional channels like email or phone calls. Some brands are even using social media to proactively address issues before they escalate. </a:t>
-            </a:r>
-          </a:p>
-          <a:p>
-            <a:pPr marL="0" indent="0">
-              <a:buNone/>
+              <a:t>% users buy directly via Facebook, Instagram, TikTok</a:t>
+            </a:r>
+            <a:r>
+              <a:rPr lang="en-US" dirty="0" smtClean="0"/>
+              <a:t>.</a:t>
+            </a:r>
+          </a:p>
+          <a:p>
+            <a:pPr lvl="0">
+              <a:lnSpc>
+                <a:spcPct val="150000"/>
+              </a:lnSpc>
+              <a:buClr>
+                <a:schemeClr val="tx1"/>
+              </a:buClr>
+              <a:buSzPct val="100000"/>
+              <a:buFont typeface="Wingdings" panose="05000000000000000000" pitchFamily="2" charset="2"/>
+              <a:buChar char="v"/>
             </a:pPr>
+            <a:r>
+              <a:rPr lang="en-US" dirty="0" smtClean="0"/>
+              <a:t>Global </a:t>
+            </a:r>
+            <a:r>
+              <a:rPr lang="en-US" dirty="0"/>
+              <a:t>social commerce market to reach $1.2 trillion by 2025. </a:t>
+            </a:r>
+            <a:endParaRPr lang="en-US" dirty="0" smtClean="0"/>
+          </a:p>
+          <a:p>
+            <a:pPr marL="0" lvl="0" indent="0">
+              <a:lnSpc>
+                <a:spcPct val="150000"/>
+              </a:lnSpc>
+              <a:buClr>
+                <a:schemeClr val="tx1"/>
+              </a:buClr>
+              <a:buSzPct val="100000"/>
+              <a:buNone/>
+            </a:pPr>
+            <a:r>
+              <a:rPr lang="en-US" b="1" dirty="0" smtClean="0">
+                <a:solidFill>
+                  <a:srgbClr val="7FFFD4"/>
+                </a:solidFill>
+              </a:rPr>
+              <a:t>Customer </a:t>
+            </a:r>
+            <a:r>
+              <a:rPr lang="en-US" b="1" dirty="0">
+                <a:solidFill>
+                  <a:srgbClr val="7FFFD4"/>
+                </a:solidFill>
+              </a:rPr>
+              <a:t>Service:</a:t>
+            </a:r>
+          </a:p>
+          <a:p>
+            <a:pPr lvl="0">
+              <a:lnSpc>
+                <a:spcPct val="150000"/>
+              </a:lnSpc>
+              <a:buClr>
+                <a:schemeClr val="tx1"/>
+              </a:buClr>
+              <a:buSzPct val="100000"/>
+              <a:buFont typeface="Wingdings" panose="05000000000000000000" pitchFamily="2" charset="2"/>
+              <a:buChar char="v"/>
+            </a:pPr>
+            <a:r>
+              <a:rPr lang="en-US" dirty="0"/>
+              <a:t> </a:t>
+            </a:r>
+            <a:r>
+              <a:rPr lang="en-US" dirty="0" smtClean="0"/>
+              <a:t>30</a:t>
+            </a:r>
+            <a:r>
+              <a:rPr lang="en-US" dirty="0"/>
+              <a:t>% faster response time than email/phone</a:t>
+            </a:r>
+            <a:r>
+              <a:rPr lang="en-US" dirty="0" smtClean="0"/>
+              <a:t>.</a:t>
+            </a:r>
+          </a:p>
+          <a:p>
+            <a:pPr lvl="0">
+              <a:lnSpc>
+                <a:spcPct val="150000"/>
+              </a:lnSpc>
+              <a:buClr>
+                <a:schemeClr val="tx1"/>
+              </a:buClr>
+              <a:buSzPct val="100000"/>
+              <a:buFont typeface="Wingdings" panose="05000000000000000000" pitchFamily="2" charset="2"/>
+              <a:buChar char="v"/>
+            </a:pPr>
+            <a:r>
+              <a:rPr lang="en-US" dirty="0"/>
+              <a:t> </a:t>
+            </a:r>
+            <a:r>
+              <a:rPr lang="en-US" dirty="0" smtClean="0"/>
+              <a:t>Brands </a:t>
+            </a:r>
+            <a:r>
+              <a:rPr lang="en-US" dirty="0"/>
+              <a:t>use it to solve issues proactively before they escalate.</a:t>
+            </a:r>
             <a:endParaRPr lang="en-US" dirty="0"/>
           </a:p>
         </p:txBody>
@@ -12124,7 +12756,7 @@
           <p:cNvPr id="2" name="Title 1">
             <a:extLst>
               <a:ext uri="{FF2B5EF4-FFF2-40B4-BE49-F238E27FC236}">
-                <a16:creationId xmlns:a16="http://schemas.microsoft.com/office/drawing/2014/main" id="{78153F7B-A644-A079-5D21-77474CEED4AD}"/>
+                <a16:creationId xmlns:a16="http://schemas.microsoft.com/office/drawing/2014/main" xmlns="" id="{78153F7B-A644-A079-5D21-77474CEED4AD}"/>
               </a:ext>
             </a:extLst>
           </p:cNvPr>
@@ -12158,7 +12790,7 @@
           <p:cNvPr id="3" name="Content Placeholder 2">
             <a:extLst>
               <a:ext uri="{FF2B5EF4-FFF2-40B4-BE49-F238E27FC236}">
-                <a16:creationId xmlns:a16="http://schemas.microsoft.com/office/drawing/2014/main" id="{B210D4B4-F3FD-305A-C95D-854CBE7983D0}"/>
+                <a16:creationId xmlns:a16="http://schemas.microsoft.com/office/drawing/2014/main" xmlns="" id="{B210D4B4-F3FD-305A-C95D-854CBE7983D0}"/>
               </a:ext>
             </a:extLst>
           </p:cNvPr>
@@ -12177,7 +12809,7 @@
         </p:spPr>
         <p:txBody>
           <a:bodyPr>
-            <a:normAutofit fontScale="92500" lnSpcReduction="10000"/>
+            <a:normAutofit/>
           </a:bodyPr>
           <a:lstStyle/>
           <a:p>
@@ -12185,12 +12817,72 @@
               <a:buNone/>
             </a:pPr>
             <a:r>
-              <a:rPr lang="en-US" sz="3200" b="1" dirty="0">
+              <a:rPr lang="en-US" sz="2200" b="1" dirty="0">
                 <a:solidFill>
-                  <a:srgbClr val="FF0000"/>
+                  <a:srgbClr val="7FFFD4"/>
                 </a:solidFill>
               </a:rPr>
               <a:t>Invest in video content creation: </a:t>
+            </a:r>
+          </a:p>
+          <a:p>
+            <a:pPr marL="0" lvl="0" indent="0">
+              <a:buClr>
+                <a:schemeClr val="tx1"/>
+              </a:buClr>
+              <a:buSzPct val="100000"/>
+              <a:buNone/>
+            </a:pPr>
+            <a:r>
+              <a:rPr lang="en-US" dirty="0"/>
+              <a:t>❖ Make engaging, authentic short videos for TikTok, Reels, Shorts</a:t>
+            </a:r>
+            <a:r>
+              <a:rPr lang="en-US" dirty="0" smtClean="0"/>
+              <a:t>.</a:t>
+            </a:r>
+          </a:p>
+          <a:p>
+            <a:pPr marL="0" lvl="0" indent="0">
+              <a:buClr>
+                <a:schemeClr val="tx1"/>
+              </a:buClr>
+              <a:buSzPct val="100000"/>
+              <a:buNone/>
+            </a:pPr>
+            <a:r>
+              <a:rPr lang="en-US" dirty="0" smtClean="0"/>
+              <a:t>❖ </a:t>
+            </a:r>
+            <a:r>
+              <a:rPr lang="en-US" dirty="0"/>
+              <a:t>Use long videos for tutorials &amp; storytelling. </a:t>
+            </a:r>
+            <a:endParaRPr lang="en-US" dirty="0" smtClean="0"/>
+          </a:p>
+          <a:p>
+            <a:pPr marL="0" lvl="0" indent="0">
+              <a:buClr>
+                <a:schemeClr val="tx1"/>
+              </a:buClr>
+              <a:buSzPct val="100000"/>
+              <a:buNone/>
+            </a:pPr>
+            <a:r>
+              <a:rPr lang="en-US" sz="2200" b="1" dirty="0" smtClean="0">
+                <a:solidFill>
+                  <a:srgbClr val="7FFFD4"/>
+                </a:solidFill>
+              </a:rPr>
+              <a:t>Target </a:t>
+            </a:r>
+            <a:r>
+              <a:rPr lang="en-US" sz="2200" b="1" dirty="0">
+                <a:solidFill>
+                  <a:srgbClr val="7FFFD4"/>
+                </a:solidFill>
+              </a:rPr>
+              <a:t>platforms strategically based on age: </a:t>
             </a:r>
           </a:p>
           <a:p>
@@ -12203,25 +12895,12 @@
               <a:buChar char="v"/>
             </a:pPr>
             <a:r>
-              <a:rPr lang="en-US" sz="2200" dirty="0"/>
-              <a:t>Prioritize creating engaging, authentic short-form videos for platforms like TikTok, Instagram Reels, and YouTube Shorts. Consider longer formats for in-depth storytelling or tutorials where appropriate.</a:t>
-            </a:r>
-          </a:p>
-          <a:p>
-            <a:pPr marL="0" lvl="0" indent="0">
-              <a:buClr>
-                <a:schemeClr val="tx1"/>
-              </a:buClr>
-              <a:buSzPct val="100000"/>
-              <a:buNone/>
-            </a:pPr>
-            <a:r>
-              <a:rPr lang="en-US" sz="3500" b="1" dirty="0">
-                <a:solidFill>
-                  <a:srgbClr val="FF0000"/>
-                </a:solidFill>
-              </a:rPr>
-              <a:t>Target platforms strategically based on age: </a:t>
+              <a:rPr lang="en-US" dirty="0"/>
+              <a:t>Instagram &amp; TikTok for younger audience</a:t>
+            </a:r>
+            <a:r>
+              <a:rPr lang="en-US" dirty="0"/>
+              <a:t>.</a:t>
             </a:r>
           </a:p>
           <a:p>
@@ -12234,8 +12913,12 @@
               <a:buChar char="v"/>
             </a:pPr>
             <a:r>
-              <a:rPr lang="en-US" sz="2200" dirty="0"/>
-              <a:t>Focus on Instagram and TikTok for younger audiences, while Facebook remains a strong option for broader demographics and older users.</a:t>
+              <a:rPr lang="en-US" dirty="0"/>
+              <a:t>Facebook </a:t>
+            </a:r>
+            <a:r>
+              <a:rPr lang="en-US" dirty="0"/>
+              <a:t>for broader &amp; older audience.</a:t>
             </a:r>
           </a:p>
           <a:p>
@@ -12247,12 +12930,52 @@
               <a:buNone/>
             </a:pPr>
             <a:r>
-              <a:rPr lang="en-US" sz="3500" b="1" dirty="0">
+              <a:rPr lang="en-US" sz="2200" b="1" dirty="0">
                 <a:solidFill>
-                  <a:srgbClr val="FF0000"/>
+                  <a:srgbClr val="7FFFD4"/>
                 </a:solidFill>
               </a:rPr>
               <a:t>Utilize social commerce features: </a:t>
+            </a:r>
+            <a:endParaRPr lang="en-US" dirty="0"/>
+          </a:p>
+          <a:p>
+            <a:pPr marL="0" lvl="0" indent="0">
+              <a:buClr>
+                <a:schemeClr val="tx1"/>
+              </a:buClr>
+              <a:buSzPct val="100000"/>
+              <a:buNone/>
+            </a:pPr>
+            <a:r>
+              <a:rPr lang="en-US" dirty="0"/>
+              <a:t>❖ Use shoppable posts &amp; live shopping for in-app purchases. </a:t>
+            </a:r>
+            <a:endParaRPr lang="en-US" dirty="0" smtClean="0"/>
+          </a:p>
+          <a:p>
+            <a:pPr marL="0" lvl="0" indent="0">
+              <a:buClr>
+                <a:schemeClr val="tx1"/>
+              </a:buClr>
+              <a:buSzPct val="100000"/>
+              <a:buNone/>
+            </a:pPr>
+            <a:r>
+              <a:rPr lang="en-US" sz="2200" b="1" dirty="0" smtClean="0">
+                <a:solidFill>
+                  <a:srgbClr val="7FFFD4"/>
+                </a:solidFill>
+              </a:rPr>
+              <a:t>Track </a:t>
+            </a:r>
+            <a:r>
+              <a:rPr lang="en-US" sz="2200" b="1" dirty="0">
+                <a:solidFill>
+                  <a:srgbClr val="7FFFD4"/>
+                </a:solidFill>
+              </a:rPr>
+              <a:t>analytics and refine strategies: </a:t>
             </a:r>
           </a:p>
           <a:p>
@@ -12265,25 +12988,16 @@
               <a:buChar char="v"/>
             </a:pPr>
             <a:r>
-              <a:rPr lang="en-US" sz="2200" dirty="0"/>
-              <a:t>Integrate shopping features and explore shoppable posts and live shopping events to capitalize on the growing trend of in-app purchases.</a:t>
-            </a:r>
-          </a:p>
-          <a:p>
-            <a:pPr marL="0" lvl="0" indent="0">
-              <a:buClr>
-                <a:schemeClr val="tx1"/>
-              </a:buClr>
-              <a:buSzPct val="100000"/>
-              <a:buNone/>
-            </a:pPr>
-            <a:r>
-              <a:rPr lang="en-US" sz="3200" b="1" dirty="0">
-                <a:solidFill>
-                  <a:srgbClr val="FF0000"/>
-                </a:solidFill>
-              </a:rPr>
-              <a:t>Track analytics and refine strategies: </a:t>
+              <a:rPr lang="en-US" dirty="0" smtClean="0"/>
+              <a:t>Monitor </a:t>
+            </a:r>
+            <a:r>
+              <a:rPr lang="en-US" dirty="0"/>
+              <a:t>KPIs like watch time, retention &amp; conversion rate</a:t>
+            </a:r>
+            <a:r>
+              <a:rPr lang="en-US" dirty="0" smtClean="0"/>
+              <a:t>.</a:t>
             </a:r>
           </a:p>
           <a:p>
@@ -12296,19 +13010,13 @@
               <a:buChar char="v"/>
             </a:pPr>
             <a:r>
-              <a:rPr lang="en-US" sz="2200" dirty="0"/>
-              <a:t>Monitor key performance indicators (KPIs) like average watch time, retention rates, and conversion rates to understand what resonates with your audience and adjust your content and strategies accordingly. </a:t>
-            </a:r>
-          </a:p>
-          <a:p>
-            <a:pPr>
-              <a:buClr>
-                <a:schemeClr val="tx1"/>
-              </a:buClr>
-              <a:buSzPct val="100000"/>
-              <a:buFont typeface="Wingdings" panose="05000000000000000000" pitchFamily="2" charset="2"/>
-              <a:buChar char="v"/>
-            </a:pPr>
+              <a:rPr lang="en-US" dirty="0" smtClean="0"/>
+              <a:t>Adjust </a:t>
+            </a:r>
+            <a:r>
+              <a:rPr lang="en-US" dirty="0"/>
+              <a:t>content strategy accordingly. </a:t>
+            </a:r>
             <a:endParaRPr lang="en-US" dirty="0"/>
           </a:p>
         </p:txBody>
